--- a/docs/support_soutenance.pptx
+++ b/docs/support_soutenance.pptx
@@ -540,6 +540,48 @@
           <a:p/>
           <a:p>
             <a:r>
+              <a:t>Ouvrir sur la légende plutôt que sur l'identité : « cette plateforme a tourné</a:t>
+            </a:r>
+          </a:p>
+          <a:p>
+            <a:r>
+              <a:t>cette nuit à 2h30, sans personne aux commandes. Je vais vous montrer comment</a:t>
+            </a:r>
+          </a:p>
+          <a:p>
+            <a:r>
+              <a:t>elle est faite. » Vingt secondes déjà budgétées, et le registre change sans</a:t>
+            </a:r>
+          </a:p>
+          <a:p>
+            <a:r>
+              <a:t>coûter une minute.</a:t>
+            </a:r>
+          </a:p>
+          <a:p/>
+          <a:p>
+            <a:r>
+              <a:t>Poser aussi l'amorce d'INC-004, sans la résoudre : « à un moment, un message</a:t>
+            </a:r>
+          </a:p>
+          <a:p>
+            <a:r>
+              <a:t>d'erreur m'a désigné un coupable qui n'avait rien à voir. J'y reviens à la</a:t>
+            </a:r>
+          </a:p>
+          <a:p>
+            <a:r>
+              <a:t>fin. » Une attente qui tient trente minutes, et qui donne à la section 10</a:t>
+            </a:r>
+          </a:p>
+          <a:p>
+            <a:r>
+              <a:t>l'attention qu'elle n'aurait pas à la vingt-cinquième minute.</a:t>
+            </a:r>
+          </a:p>
+          <a:p/>
+          <a:p>
+            <a:r>
               <a:t>---</a:t>
             </a:r>
           </a:p>
@@ -816,6 +858,43 @@
           <a:p/>
           <a:p>
             <a:r>
+              <a:t>La règle sous-jacente, à énoncer à l'oral : Snowflake applique ce qui se vérifie</a:t>
+            </a:r>
+          </a:p>
+          <a:p>
+            <a:r>
+              <a:t>sur la colonne seule, et ignore tout ce qui suppose de regarder une autre ligne</a:t>
+            </a:r>
+          </a:p>
+          <a:p>
+            <a:r>
+              <a:t>ou une autre table.</a:t>
+            </a:r>
+          </a:p>
+          <a:p/>
+          <a:p>
+            <a:r>
+              <a:t>Enchaîner sur ce que cela coûte : l'intégrité est reportée hors du moteur, sur</a:t>
+            </a:r>
+          </a:p>
+          <a:p>
+            <a:r>
+              <a:t>29 contrats déclaratifs dbt et 8 contrôles applicatifs, rejoués à chaque push et</a:t>
+            </a:r>
+          </a:p>
+          <a:p>
+            <a:r>
+              <a:t>éprouvés en négatif sur le même jeu de données fautif. Vérifié empiriquement,</a:t>
+            </a:r>
+          </a:p>
+          <a:p>
+            <a:r>
+              <a:t>pas lu dans une documentation : `sql/verify_snowflake_constraints.sql`.</a:t>
+            </a:r>
+          </a:p>
+          <a:p/>
+          <a:p>
+            <a:r>
               <a:t>Si la question « pourquoi deux filets et pas un seul ? » vient : ils ne</a:t>
             </a:r>
           </a:p>
@@ -2898,6 +2977,27 @@
           <a:lstStyle/>
           <a:p>
             <a:r>
+              <a:t>A dire devant l'image :</a:t>
+            </a:r>
+          </a:p>
+          <a:p>
+            <a:r>
+              <a:t>- Le message ne dit pas ce qui ne va pas : il dit qu'il n'a pas su lire ce qui ne va pas</a:t>
+            </a:r>
+          </a:p>
+          <a:p>
+            <a:r>
+              <a:t>- L'octet 0xe9 est le « é » de « échouée », dans un message PostgreSQL en français</a:t>
+            </a:r>
+          </a:p>
+          <a:p>
+            <a:r>
+              <a:t>- Fausse piste évidente, et coûteuse : le projet est stocké sous un chemin accentué</a:t>
+            </a:r>
+          </a:p>
+          <a:p/>
+          <a:p>
+            <a:r>
               <a:t>L'intérêt de cet incident n'est pas sa difficulté, qui est faible. C'est que **le</a:t>
             </a:r>
           </a:p>
@@ -2994,6 +3094,37 @@
         <p:txBody>
           <a:bodyPr/>
           <a:lstStyle/>
+          <a:p>
+            <a:r>
+              <a:t>A dire devant l'image :</a:t>
+            </a:r>
+          </a:p>
+          <a:p>
+            <a:r>
+              <a:t>- Ce qui a tranché : la LANGUE du message d'erreur</a:t>
+            </a:r>
+          </a:p>
+          <a:p>
+            <a:r>
+              <a:t>- L'image du conteneur est une Alpine en locale C : elle ne peut répondre qu'en anglais ASCII</a:t>
+            </a:r>
+          </a:p>
+          <a:p>
+            <a:r>
+              <a:t>- Un message en français accentué prouvait donc que l'interlocuteur n'était pas le conteneur</a:t>
+            </a:r>
+          </a:p>
+          <a:p>
+            <a:r>
+              <a:t>- Trois scénarios de correction pesés, dont deux écartés pour leurs effets de bord</a:t>
+            </a:r>
+          </a:p>
+          <a:p>
+            <a:r>
+              <a:t>- Retenu : publier sur le port hôte 5433, et écrire dans le fichier pourquoi ce n'est pas 5432</a:t>
+            </a:r>
+          </a:p>
+          <a:p/>
           <a:p>
             <a:r>
               <a:t>C'est le cœur du livrable C4.4.2 : la nature du problème, les actions selon les</a:t>
@@ -7090,7 +7221,7 @@
                 </a:solidFill>
                 <a:latin typeface="Segoe UI"/>
               </a:rPr>
-              <a:t>Concevoir et operer une infrastructure data</a:t>
+              <a:t>Une plateforme qui a tourné cette nuit à 02h30, sans personne aux commandes</a:t>
             </a:r>
           </a:p>
         </p:txBody>
@@ -8061,7 +8192,7 @@
         <p:spPr>
           <a:xfrm>
             <a:off x="658368" y="1755648"/>
-            <a:ext cx="10874959" cy="4443984"/>
+            <a:ext cx="10874959" cy="2537460"/>
           </a:xfrm>
           <a:prstGeom prst="roundRect">
             <a:avLst/>
@@ -8107,7 +8238,7 @@
         <p:spPr>
           <a:xfrm>
             <a:off x="969264" y="1993392"/>
-            <a:ext cx="10253167" cy="3986784"/>
+            <a:ext cx="10253167" cy="2080260"/>
           </a:xfrm>
           <a:prstGeom prst="rect">
             <a:avLst/>
@@ -8566,13 +8697,96 @@
       </p:sp>
       <p:sp>
         <p:nvSpPr>
-          <p:cNvPr id="5" name="Rectangle 4"/>
+          <p:cNvPr id="5" name="TextBox 4"/>
+          <p:cNvSpPr txBox="1"/>
+          <p:nvPr/>
+        </p:nvSpPr>
+        <p:spPr>
+          <a:xfrm>
+            <a:off x="658368" y="1755648"/>
+            <a:ext cx="5208879" cy="329184"/>
+          </a:xfrm>
+          <a:prstGeom prst="rect">
+            <a:avLst/>
+          </a:prstGeom>
+          <a:noFill/>
+        </p:spPr>
+        <p:txBody>
+          <a:bodyPr wrap="square" lIns="0" rIns="0" tIns="0" bIns="0">
+            <a:spAutoFit/>
+          </a:bodyPr>
+          <a:lstStyle/>
+          <a:p>
+            <a:pPr algn="l">
+              <a:spcBef>
+                <a:spcPts val="0"/>
+              </a:spcBef>
+            </a:pPr>
+            <a:r>
+              <a:rPr sz="1150" b="1">
+                <a:solidFill>
+                  <a:srgbClr val="52514E"/>
+                </a:solidFill>
+                <a:latin typeface="Segoe UI"/>
+              </a:rPr>
+              <a:t>DÉCLARÉ DANS LE SCHÉMA</a:t>
+            </a:r>
+          </a:p>
+        </p:txBody>
+      </p:sp>
+      <p:sp>
+        <p:nvSpPr>
+          <p:cNvPr id="6" name="Rectangle 5"/>
           <p:cNvSpPr/>
           <p:nvPr/>
         </p:nvSpPr>
         <p:spPr>
           <a:xfrm>
-            <a:off x="658368" y="1879092"/>
+            <a:off x="658368" y="2103120"/>
+            <a:ext cx="5208879" cy="19000"/>
+          </a:xfrm>
+          <a:prstGeom prst="rect">
+            <a:avLst/>
+          </a:prstGeom>
+          <a:solidFill>
+            <a:srgbClr val="C9CED5"/>
+          </a:solidFill>
+          <a:ln>
+            <a:noFill/>
+          </a:ln>
+          <a:effectLst/>
+        </p:spPr>
+        <p:style>
+          <a:lnRef idx="1">
+            <a:schemeClr val="accent1"/>
+          </a:lnRef>
+          <a:fillRef idx="3">
+            <a:schemeClr val="accent1"/>
+          </a:fillRef>
+          <a:effectRef idx="2">
+            <a:schemeClr val="accent1"/>
+          </a:effectRef>
+          <a:fontRef idx="minor">
+            <a:schemeClr val="lt1"/>
+          </a:fontRef>
+        </p:style>
+        <p:txBody>
+          <a:bodyPr rtlCol="0" anchor="ctr"/>
+          <a:lstStyle/>
+          <a:p>
+            <a:pPr algn="ctr"/>
+          </a:p>
+        </p:txBody>
+      </p:sp>
+      <p:sp>
+        <p:nvSpPr>
+          <p:cNvPr id="7" name="Rectangle 6"/>
+          <p:cNvSpPr/>
+          <p:nvPr/>
+        </p:nvSpPr>
+        <p:spPr>
+          <a:xfrm>
+            <a:off x="658368" y="2446020"/>
             <a:ext cx="68580" cy="68580"/>
           </a:xfrm>
           <a:prstGeom prst="rect">
@@ -8610,14 +8824,14 @@
       </p:sp>
       <p:sp>
         <p:nvSpPr>
-          <p:cNvPr id="6" name="TextBox 5"/>
+          <p:cNvPr id="8" name="TextBox 7"/>
           <p:cNvSpPr txBox="1"/>
           <p:nvPr/>
         </p:nvSpPr>
         <p:spPr>
           <a:xfrm>
-            <a:off x="896112" y="1796796"/>
-            <a:ext cx="10637215" cy="740664"/>
+            <a:off x="896112" y="2363724"/>
+            <a:ext cx="4971135" cy="969264"/>
           </a:xfrm>
           <a:prstGeom prst="rect">
             <a:avLst/>
@@ -8639,26 +8853,26 @@
               </a:spcBef>
             </a:pPr>
             <a:r>
-              <a:rPr sz="1750" b="0">
+              <a:rPr sz="1550" b="0">
                 <a:solidFill>
                   <a:srgbClr val="0B0B0B"/>
                 </a:solidFill>
                 <a:latin typeface="Segoe UI"/>
               </a:rPr>
-              <a:t>Snowflake accepte CHECK, FOREIGN KEY, PRIMARY KEY et UNIQUE, et ne les applique pas</a:t>
-            </a:r>
-          </a:p>
-        </p:txBody>
-      </p:sp>
-      <p:sp>
-        <p:nvSpPr>
-          <p:cNvPr id="7" name="Rectangle 6"/>
+              <a:t>CHECK, sur une valeur</a:t>
+            </a:r>
+          </a:p>
+        </p:txBody>
+      </p:sp>
+      <p:sp>
+        <p:nvSpPr>
+          <p:cNvPr id="9" name="Rectangle 8"/>
           <p:cNvSpPr/>
           <p:nvPr/>
         </p:nvSpPr>
         <p:spPr>
           <a:xfrm>
-            <a:off x="658368" y="2604516"/>
+            <a:off x="658368" y="3392424"/>
             <a:ext cx="68580" cy="68580"/>
           </a:xfrm>
           <a:prstGeom prst="rect">
@@ -8696,14 +8910,14 @@
       </p:sp>
       <p:sp>
         <p:nvSpPr>
-          <p:cNvPr id="8" name="TextBox 7"/>
+          <p:cNvPr id="10" name="TextBox 9"/>
           <p:cNvSpPr txBox="1"/>
           <p:nvPr/>
         </p:nvSpPr>
         <p:spPr>
           <a:xfrm>
-            <a:off x="896112" y="2522220"/>
-            <a:ext cx="10637215" cy="740664"/>
+            <a:off x="896112" y="3310128"/>
+            <a:ext cx="4971135" cy="969264"/>
           </a:xfrm>
           <a:prstGeom prst="rect">
             <a:avLst/>
@@ -8725,26 +8939,26 @@
               </a:spcBef>
             </a:pPr>
             <a:r>
-              <a:rPr sz="1750" b="0">
+              <a:rPr sz="1550" b="0">
                 <a:solidFill>
                   <a:srgbClr val="0B0B0B"/>
                 </a:solidFill>
                 <a:latin typeface="Segoe UI"/>
               </a:rPr>
-              <a:t>Seules les contraintes portées par la colonne sont opposables : NOT NULL, type, longueur</a:t>
-            </a:r>
-          </a:p>
-        </p:txBody>
-      </p:sp>
-      <p:sp>
-        <p:nvSpPr>
-          <p:cNvPr id="9" name="Rectangle 8"/>
+              <a:t>FOREIGN KEY, entre deux tables</a:t>
+            </a:r>
+          </a:p>
+        </p:txBody>
+      </p:sp>
+      <p:sp>
+        <p:nvSpPr>
+          <p:cNvPr id="11" name="Rectangle 10"/>
           <p:cNvSpPr/>
           <p:nvPr/>
         </p:nvSpPr>
         <p:spPr>
           <a:xfrm>
-            <a:off x="658368" y="3329940"/>
+            <a:off x="658368" y="4338828"/>
             <a:ext cx="68580" cy="68580"/>
           </a:xfrm>
           <a:prstGeom prst="rect">
@@ -8782,14 +8996,14 @@
       </p:sp>
       <p:sp>
         <p:nvSpPr>
-          <p:cNvPr id="10" name="TextBox 9"/>
+          <p:cNvPr id="12" name="TextBox 11"/>
           <p:cNvSpPr txBox="1"/>
           <p:nvPr/>
         </p:nvSpPr>
         <p:spPr>
           <a:xfrm>
-            <a:off x="896112" y="3247644"/>
-            <a:ext cx="10637215" cy="740664"/>
+            <a:off x="896112" y="4256532"/>
+            <a:ext cx="4971135" cy="969264"/>
           </a:xfrm>
           <a:prstGeom prst="rect">
             <a:avLst/>
@@ -8811,26 +9025,26 @@
               </a:spcBef>
             </a:pPr>
             <a:r>
-              <a:rPr sz="1750" b="0">
+              <a:rPr sz="1550" b="0">
                 <a:solidFill>
                   <a:srgbClr val="0B0B0B"/>
                 </a:solidFill>
                 <a:latin typeface="Segoe UI"/>
               </a:rPr>
-              <a:t>Vérifié empiriquement, pas lu dans une documentation : sql/verify_snowflake_constraints.sql</a:t>
-            </a:r>
-          </a:p>
-        </p:txBody>
-      </p:sp>
-      <p:sp>
-        <p:nvSpPr>
-          <p:cNvPr id="11" name="Rectangle 10"/>
+              <a:t>PRIMARY KEY, entre lignes</a:t>
+            </a:r>
+          </a:p>
+        </p:txBody>
+      </p:sp>
+      <p:sp>
+        <p:nvSpPr>
+          <p:cNvPr id="13" name="Rectangle 12"/>
           <p:cNvSpPr/>
           <p:nvPr/>
         </p:nvSpPr>
         <p:spPr>
           <a:xfrm>
-            <a:off x="658368" y="4055364"/>
+            <a:off x="658368" y="5285232"/>
             <a:ext cx="68580" cy="68580"/>
           </a:xfrm>
           <a:prstGeom prst="rect">
@@ -8868,14 +9082,14 @@
       </p:sp>
       <p:sp>
         <p:nvSpPr>
-          <p:cNvPr id="12" name="TextBox 11"/>
+          <p:cNvPr id="14" name="TextBox 13"/>
           <p:cNvSpPr txBox="1"/>
           <p:nvPr/>
         </p:nvSpPr>
         <p:spPr>
           <a:xfrm>
-            <a:off x="896112" y="3973068"/>
-            <a:ext cx="10637215" cy="740664"/>
+            <a:off x="896112" y="5202936"/>
+            <a:ext cx="4971135" cy="969264"/>
           </a:xfrm>
           <a:prstGeom prst="rect">
             <a:avLst/>
@@ -8897,26 +9111,109 @@
               </a:spcBef>
             </a:pPr>
             <a:r>
-              <a:rPr sz="1750" b="0">
+              <a:rPr sz="1550" b="0">
                 <a:solidFill>
                   <a:srgbClr val="0B0B0B"/>
                 </a:solidFill>
                 <a:latin typeface="Segoe UI"/>
               </a:rPr>
-              <a:t>L'intégrité est donc reportée hors du moteur, sur deux filets</a:t>
-            </a:r>
-          </a:p>
-        </p:txBody>
-      </p:sp>
-      <p:sp>
-        <p:nvSpPr>
-          <p:cNvPr id="13" name="Rectangle 12"/>
+              <a:t>UNIQUE, entre lignes</a:t>
+            </a:r>
+          </a:p>
+        </p:txBody>
+      </p:sp>
+      <p:sp>
+        <p:nvSpPr>
+          <p:cNvPr id="15" name="TextBox 14"/>
+          <p:cNvSpPr txBox="1"/>
+          <p:nvPr/>
+        </p:nvSpPr>
+        <p:spPr>
+          <a:xfrm>
+            <a:off x="6324447" y="1755648"/>
+            <a:ext cx="5208879" cy="329184"/>
+          </a:xfrm>
+          <a:prstGeom prst="rect">
+            <a:avLst/>
+          </a:prstGeom>
+          <a:noFill/>
+        </p:spPr>
+        <p:txBody>
+          <a:bodyPr wrap="square" lIns="0" rIns="0" tIns="0" bIns="0">
+            <a:spAutoFit/>
+          </a:bodyPr>
+          <a:lstStyle/>
+          <a:p>
+            <a:pPr algn="l">
+              <a:spcBef>
+                <a:spcPts val="0"/>
+              </a:spcBef>
+            </a:pPr>
+            <a:r>
+              <a:rPr sz="1150" b="1">
+                <a:solidFill>
+                  <a:srgbClr val="EB6834"/>
+                </a:solidFill>
+                <a:latin typeface="Segoe UI"/>
+              </a:rPr>
+              <a:t>RÉELLEMENT APPLIQUÉ PAR LE MOTEUR</a:t>
+            </a:r>
+          </a:p>
+        </p:txBody>
+      </p:sp>
+      <p:sp>
+        <p:nvSpPr>
+          <p:cNvPr id="16" name="Rectangle 15"/>
           <p:cNvSpPr/>
           <p:nvPr/>
         </p:nvSpPr>
         <p:spPr>
           <a:xfrm>
-            <a:off x="658368" y="4780788"/>
+            <a:off x="6324447" y="2103120"/>
+            <a:ext cx="5208879" cy="19000"/>
+          </a:xfrm>
+          <a:prstGeom prst="rect">
+            <a:avLst/>
+          </a:prstGeom>
+          <a:solidFill>
+            <a:srgbClr val="C9CED5"/>
+          </a:solidFill>
+          <a:ln>
+            <a:noFill/>
+          </a:ln>
+          <a:effectLst/>
+        </p:spPr>
+        <p:style>
+          <a:lnRef idx="1">
+            <a:schemeClr val="accent1"/>
+          </a:lnRef>
+          <a:fillRef idx="3">
+            <a:schemeClr val="accent1"/>
+          </a:fillRef>
+          <a:effectRef idx="2">
+            <a:schemeClr val="accent1"/>
+          </a:effectRef>
+          <a:fontRef idx="minor">
+            <a:schemeClr val="lt1"/>
+          </a:fontRef>
+        </p:style>
+        <p:txBody>
+          <a:bodyPr rtlCol="0" anchor="ctr"/>
+          <a:lstStyle/>
+          <a:p>
+            <a:pPr algn="ctr"/>
+          </a:p>
+        </p:txBody>
+      </p:sp>
+      <p:sp>
+        <p:nvSpPr>
+          <p:cNvPr id="17" name="Rectangle 16"/>
+          <p:cNvSpPr/>
+          <p:nvPr/>
+        </p:nvSpPr>
+        <p:spPr>
+          <a:xfrm>
+            <a:off x="6324447" y="2446020"/>
             <a:ext cx="68580" cy="68580"/>
           </a:xfrm>
           <a:prstGeom prst="rect">
@@ -8954,14 +9251,14 @@
       </p:sp>
       <p:sp>
         <p:nvSpPr>
-          <p:cNvPr id="14" name="TextBox 13"/>
+          <p:cNvPr id="18" name="TextBox 17"/>
           <p:cNvSpPr txBox="1"/>
           <p:nvPr/>
         </p:nvSpPr>
         <p:spPr>
           <a:xfrm>
-            <a:off x="896112" y="4698492"/>
-            <a:ext cx="10637215" cy="740664"/>
+            <a:off x="6562191" y="2363724"/>
+            <a:ext cx="4971135" cy="969264"/>
           </a:xfrm>
           <a:prstGeom prst="rect">
             <a:avLst/>
@@ -8983,26 +9280,26 @@
               </a:spcBef>
             </a:pPr>
             <a:r>
-              <a:rPr sz="1750" b="0">
+              <a:rPr sz="1550" b="0">
                 <a:solidFill>
                   <a:srgbClr val="0B0B0B"/>
                 </a:solidFill>
                 <a:latin typeface="Segoe UI"/>
               </a:rPr>
-              <a:t>29 contrats déclaratifs dbt, et 8 contrôles applicatifs, rejoués à chaque push</a:t>
-            </a:r>
-          </a:p>
-        </p:txBody>
-      </p:sp>
-      <p:sp>
-        <p:nvSpPr>
-          <p:cNvPr id="15" name="Rectangle 14"/>
+              <a:t>NOT NULL</a:t>
+            </a:r>
+          </a:p>
+        </p:txBody>
+      </p:sp>
+      <p:sp>
+        <p:nvSpPr>
+          <p:cNvPr id="19" name="Rectangle 18"/>
           <p:cNvSpPr/>
           <p:nvPr/>
         </p:nvSpPr>
         <p:spPr>
           <a:xfrm>
-            <a:off x="658368" y="5506212"/>
+            <a:off x="6324447" y="3392424"/>
             <a:ext cx="68580" cy="68580"/>
           </a:xfrm>
           <a:prstGeom prst="rect">
@@ -9040,14 +9337,14 @@
       </p:sp>
       <p:sp>
         <p:nvSpPr>
-          <p:cNvPr id="16" name="TextBox 15"/>
+          <p:cNvPr id="20" name="TextBox 19"/>
           <p:cNvSpPr txBox="1"/>
           <p:nvPr/>
         </p:nvSpPr>
         <p:spPr>
           <a:xfrm>
-            <a:off x="896112" y="5423916"/>
-            <a:ext cx="10637215" cy="740664"/>
+            <a:off x="6562191" y="3310128"/>
+            <a:ext cx="4971135" cy="969264"/>
           </a:xfrm>
           <a:prstGeom prst="rect">
             <a:avLst/>
@@ -9069,27 +9366,27 @@
               </a:spcBef>
             </a:pPr>
             <a:r>
-              <a:rPr sz="1750" b="0">
+              <a:rPr sz="1550" b="0">
                 <a:solidFill>
                   <a:srgbClr val="0B0B0B"/>
                 </a:solidFill>
                 <a:latin typeface="Segoe UI"/>
               </a:rPr>
-              <a:t>Les deux sont éprouvés en négatif sur le même jeu de données fautif</a:t>
-            </a:r>
-          </a:p>
-        </p:txBody>
-      </p:sp>
-      <p:sp>
-        <p:nvSpPr>
-          <p:cNvPr id="17" name="Rectangle 16"/>
+              <a:t>Le type de la colonne</a:t>
+            </a:r>
+          </a:p>
+        </p:txBody>
+      </p:sp>
+      <p:sp>
+        <p:nvSpPr>
+          <p:cNvPr id="21" name="Rectangle 20"/>
           <p:cNvSpPr/>
           <p:nvPr/>
         </p:nvSpPr>
         <p:spPr>
           <a:xfrm>
-            <a:off x="658368" y="6291072"/>
-            <a:ext cx="28000" cy="146304"/>
+            <a:off x="6324447" y="4338828"/>
+            <a:ext cx="68580" cy="68580"/>
           </a:xfrm>
           <a:prstGeom prst="rect">
             <a:avLst/>
@@ -9126,14 +9423,14 @@
       </p:sp>
       <p:sp>
         <p:nvSpPr>
-          <p:cNvPr id="18" name="TextBox 17"/>
+          <p:cNvPr id="22" name="TextBox 21"/>
           <p:cNvSpPr txBox="1"/>
           <p:nvPr/>
         </p:nvSpPr>
         <p:spPr>
           <a:xfrm>
-            <a:off x="786384" y="6254496"/>
-            <a:ext cx="8229600" cy="274320"/>
+            <a:off x="6562191" y="4256532"/>
+            <a:ext cx="4971135" cy="969264"/>
           </a:xfrm>
           <a:prstGeom prst="rect">
             <a:avLst/>
@@ -9147,6 +9444,178 @@
           <a:lstStyle/>
           <a:p>
             <a:pPr algn="l">
+              <a:lnSpc>
+                <a:spcPct val="115000"/>
+              </a:lnSpc>
+              <a:spcBef>
+                <a:spcPts val="0"/>
+              </a:spcBef>
+            </a:pPr>
+            <a:r>
+              <a:rPr sz="1550" b="0">
+                <a:solidFill>
+                  <a:srgbClr val="0B0B0B"/>
+                </a:solidFill>
+                <a:latin typeface="Segoe UI"/>
+              </a:rPr>
+              <a:t>La longueur de la colonne</a:t>
+            </a:r>
+          </a:p>
+        </p:txBody>
+      </p:sp>
+      <p:sp>
+        <p:nvSpPr>
+          <p:cNvPr id="23" name="Rectangle 22"/>
+          <p:cNvSpPr/>
+          <p:nvPr/>
+        </p:nvSpPr>
+        <p:spPr>
+          <a:xfrm>
+            <a:off x="6324447" y="5285232"/>
+            <a:ext cx="68580" cy="68580"/>
+          </a:xfrm>
+          <a:prstGeom prst="rect">
+            <a:avLst/>
+          </a:prstGeom>
+          <a:solidFill>
+            <a:srgbClr val="EB6834"/>
+          </a:solidFill>
+          <a:ln>
+            <a:noFill/>
+          </a:ln>
+          <a:effectLst/>
+        </p:spPr>
+        <p:style>
+          <a:lnRef idx="1">
+            <a:schemeClr val="accent1"/>
+          </a:lnRef>
+          <a:fillRef idx="3">
+            <a:schemeClr val="accent1"/>
+          </a:fillRef>
+          <a:effectRef idx="2">
+            <a:schemeClr val="accent1"/>
+          </a:effectRef>
+          <a:fontRef idx="minor">
+            <a:schemeClr val="lt1"/>
+          </a:fontRef>
+        </p:style>
+        <p:txBody>
+          <a:bodyPr rtlCol="0" anchor="ctr"/>
+          <a:lstStyle/>
+          <a:p>
+            <a:pPr algn="ctr"/>
+          </a:p>
+        </p:txBody>
+      </p:sp>
+      <p:sp>
+        <p:nvSpPr>
+          <p:cNvPr id="24" name="TextBox 23"/>
+          <p:cNvSpPr txBox="1"/>
+          <p:nvPr/>
+        </p:nvSpPr>
+        <p:spPr>
+          <a:xfrm>
+            <a:off x="6562191" y="5202936"/>
+            <a:ext cx="4971135" cy="969264"/>
+          </a:xfrm>
+          <a:prstGeom prst="rect">
+            <a:avLst/>
+          </a:prstGeom>
+          <a:noFill/>
+        </p:spPr>
+        <p:txBody>
+          <a:bodyPr wrap="square" lIns="0" rIns="0" tIns="0" bIns="0">
+            <a:spAutoFit/>
+          </a:bodyPr>
+          <a:lstStyle/>
+          <a:p>
+            <a:pPr algn="l">
+              <a:lnSpc>
+                <a:spcPct val="115000"/>
+              </a:lnSpc>
+              <a:spcBef>
+                <a:spcPts val="0"/>
+              </a:spcBef>
+            </a:pPr>
+            <a:r>
+              <a:rPr sz="1550" b="0">
+                <a:solidFill>
+                  <a:srgbClr val="0B0B0B"/>
+                </a:solidFill>
+                <a:latin typeface="Segoe UI"/>
+              </a:rPr>
+              <a:t>Rien d'autre</a:t>
+            </a:r>
+          </a:p>
+        </p:txBody>
+      </p:sp>
+      <p:sp>
+        <p:nvSpPr>
+          <p:cNvPr id="25" name="Rectangle 24"/>
+          <p:cNvSpPr/>
+          <p:nvPr/>
+        </p:nvSpPr>
+        <p:spPr>
+          <a:xfrm>
+            <a:off x="658368" y="6291072"/>
+            <a:ext cx="28000" cy="146304"/>
+          </a:xfrm>
+          <a:prstGeom prst="rect">
+            <a:avLst/>
+          </a:prstGeom>
+          <a:solidFill>
+            <a:srgbClr val="EB6834"/>
+          </a:solidFill>
+          <a:ln>
+            <a:noFill/>
+          </a:ln>
+          <a:effectLst/>
+        </p:spPr>
+        <p:style>
+          <a:lnRef idx="1">
+            <a:schemeClr val="accent1"/>
+          </a:lnRef>
+          <a:fillRef idx="3">
+            <a:schemeClr val="accent1"/>
+          </a:fillRef>
+          <a:effectRef idx="2">
+            <a:schemeClr val="accent1"/>
+          </a:effectRef>
+          <a:fontRef idx="minor">
+            <a:schemeClr val="lt1"/>
+          </a:fontRef>
+        </p:style>
+        <p:txBody>
+          <a:bodyPr rtlCol="0" anchor="ctr"/>
+          <a:lstStyle/>
+          <a:p>
+            <a:pPr algn="ctr"/>
+          </a:p>
+        </p:txBody>
+      </p:sp>
+      <p:sp>
+        <p:nvSpPr>
+          <p:cNvPr id="26" name="TextBox 25"/>
+          <p:cNvSpPr txBox="1"/>
+          <p:nvPr/>
+        </p:nvSpPr>
+        <p:spPr>
+          <a:xfrm>
+            <a:off x="786384" y="6254496"/>
+            <a:ext cx="8229600" cy="274320"/>
+          </a:xfrm>
+          <a:prstGeom prst="rect">
+            <a:avLst/>
+          </a:prstGeom>
+          <a:noFill/>
+        </p:spPr>
+        <p:txBody>
+          <a:bodyPr wrap="square" lIns="0" rIns="0" tIns="0" bIns="0">
+            <a:spAutoFit/>
+          </a:bodyPr>
+          <a:lstStyle/>
+          <a:p>
+            <a:pPr algn="l">
               <a:spcBef>
                 <a:spcPts val="0"/>
               </a:spcBef>
@@ -9165,7 +9634,7 @@
       </p:sp>
       <p:sp>
         <p:nvSpPr>
-          <p:cNvPr id="19" name="TextBox 18"/>
+          <p:cNvPr id="27" name="TextBox 26"/>
           <p:cNvSpPr txBox="1"/>
           <p:nvPr/>
         </p:nvSpPr>
@@ -11400,7 +11869,7 @@
         <p:spPr>
           <a:xfrm>
             <a:off x="658368" y="1755648"/>
-            <a:ext cx="10874959" cy="4443984"/>
+            <a:ext cx="10874959" cy="3287268"/>
           </a:xfrm>
           <a:prstGeom prst="roundRect">
             <a:avLst/>
@@ -11446,7 +11915,7 @@
         <p:spPr>
           <a:xfrm>
             <a:off x="969264" y="1993392"/>
-            <a:ext cx="10253167" cy="3986784"/>
+            <a:ext cx="10253167" cy="2830068"/>
           </a:xfrm>
           <a:prstGeom prst="rect">
             <a:avLst/>
@@ -12673,7 +13142,7 @@
         <p:spPr>
           <a:xfrm>
             <a:off x="658368" y="1755648"/>
-            <a:ext cx="10874959" cy="4443984"/>
+            <a:ext cx="10874959" cy="3287268"/>
           </a:xfrm>
           <a:prstGeom prst="roundRect">
             <a:avLst/>
@@ -12719,7 +13188,7 @@
         <p:spPr>
           <a:xfrm>
             <a:off x="969264" y="1993392"/>
-            <a:ext cx="10253167" cy="3986784"/>
+            <a:ext cx="10253167" cy="2830068"/>
           </a:xfrm>
           <a:prstGeom prst="rect">
             <a:avLst/>
@@ -12981,7 +13450,7 @@
         </p:nvSpPr>
         <p:spPr>
           <a:xfrm>
-            <a:off x="658368" y="5925312"/>
+            <a:off x="658368" y="5189220"/>
             <a:ext cx="10874959" cy="274320"/>
           </a:xfrm>
           <a:prstGeom prst="rect">
@@ -16593,7 +17062,7 @@
         <p:spPr>
           <a:xfrm>
             <a:off x="658368" y="1755648"/>
-            <a:ext cx="10874959" cy="4443984"/>
+            <a:ext cx="10874959" cy="3287268"/>
           </a:xfrm>
           <a:prstGeom prst="roundRect">
             <a:avLst/>
@@ -16639,7 +17108,7 @@
         <p:spPr>
           <a:xfrm>
             <a:off x="969264" y="1993392"/>
-            <a:ext cx="10253167" cy="3986784"/>
+            <a:ext cx="10253167" cy="2830068"/>
           </a:xfrm>
           <a:prstGeom prst="rect">
             <a:avLst/>
@@ -18509,13 +18978,68 @@
       </p:sp>
       <p:sp>
         <p:nvSpPr>
-          <p:cNvPr id="5" name="Rectangle 4"/>
+          <p:cNvPr id="5" name="TextBox 4"/>
+          <p:cNvSpPr txBox="1"/>
+          <p:nvPr/>
+        </p:nvSpPr>
+        <p:spPr>
+          <a:xfrm>
+            <a:off x="658368" y="2029968"/>
+            <a:ext cx="4297680" cy="2011680"/>
+          </a:xfrm>
+          <a:prstGeom prst="rect">
+            <a:avLst/>
+          </a:prstGeom>
+          <a:noFill/>
+        </p:spPr>
+        <p:txBody>
+          <a:bodyPr wrap="square" lIns="0" rIns="0" tIns="0" bIns="0">
+            <a:spAutoFit/>
+          </a:bodyPr>
+          <a:lstStyle/>
+          <a:p>
+            <a:pPr algn="l">
+              <a:spcBef>
+                <a:spcPts val="0"/>
+              </a:spcBef>
+            </a:pPr>
+            <a:r>
+              <a:rPr sz="7600" b="1">
+                <a:solidFill>
+                  <a:srgbClr val="0B0B0B"/>
+                </a:solidFill>
+                <a:latin typeface="Segoe UI"/>
+              </a:rPr>
+              <a:t>11</a:t>
+            </a:r>
+          </a:p>
+          <a:p>
+            <a:pPr algn="l">
+              <a:spcBef>
+                <a:spcPts val="600"/>
+              </a:spcBef>
+            </a:pPr>
+            <a:r>
+              <a:rPr sz="1400" b="0">
+                <a:solidFill>
+                  <a:srgbClr val="52514E"/>
+                </a:solidFill>
+                <a:latin typeface="Segoe UI"/>
+              </a:rPr>
+              <a:t>points de vigilance ouverts, sur treize numérotés</a:t>
+            </a:r>
+          </a:p>
+        </p:txBody>
+      </p:sp>
+      <p:sp>
+        <p:nvSpPr>
+          <p:cNvPr id="6" name="Rectangle 5"/>
           <p:cNvSpPr/>
           <p:nvPr/>
         </p:nvSpPr>
         <p:spPr>
           <a:xfrm>
-            <a:off x="658368" y="1879092"/>
+            <a:off x="5504688" y="1879092"/>
             <a:ext cx="68580" cy="68580"/>
           </a:xfrm>
           <a:prstGeom prst="rect">
@@ -18553,14 +19077,14 @@
       </p:sp>
       <p:sp>
         <p:nvSpPr>
-          <p:cNvPr id="6" name="TextBox 5"/>
+          <p:cNvPr id="7" name="TextBox 6"/>
           <p:cNvSpPr txBox="1"/>
           <p:nvPr/>
         </p:nvSpPr>
         <p:spPr>
           <a:xfrm>
-            <a:off x="896112" y="1796796"/>
-            <a:ext cx="10637215" cy="888796"/>
+            <a:off x="5742432" y="1796796"/>
+            <a:ext cx="5790895" cy="740664"/>
           </a:xfrm>
           <a:prstGeom prst="rect">
             <a:avLst/>
@@ -18582,26 +19106,26 @@
               </a:spcBef>
             </a:pPr>
             <a:r>
-              <a:rPr sz="1750" b="0">
+              <a:rPr sz="1600" b="0">
                 <a:solidFill>
                   <a:srgbClr val="0B0B0B"/>
                 </a:solidFill>
                 <a:latin typeface="Segoe UI"/>
               </a:rPr>
-              <a:t>Treize points de vigilance, dont deux datés</a:t>
-            </a:r>
-          </a:p>
-        </p:txBody>
-      </p:sp>
-      <p:sp>
-        <p:nvSpPr>
-          <p:cNvPr id="7" name="Rectangle 6"/>
+              <a:t>Nommés, numérotés, et pour deux d'entre eux datés</a:t>
+            </a:r>
+          </a:p>
+        </p:txBody>
+      </p:sp>
+      <p:sp>
+        <p:nvSpPr>
+          <p:cNvPr id="8" name="Rectangle 7"/>
           <p:cNvSpPr/>
           <p:nvPr/>
         </p:nvSpPr>
         <p:spPr>
           <a:xfrm>
-            <a:off x="658368" y="2749600"/>
+            <a:off x="5504688" y="2604516"/>
             <a:ext cx="68580" cy="68580"/>
           </a:xfrm>
           <a:prstGeom prst="rect">
@@ -18639,14 +19163,14 @@
       </p:sp>
       <p:sp>
         <p:nvSpPr>
-          <p:cNvPr id="8" name="TextBox 7"/>
+          <p:cNvPr id="9" name="TextBox 8"/>
           <p:cNvSpPr txBox="1"/>
           <p:nvPr/>
         </p:nvSpPr>
         <p:spPr>
           <a:xfrm>
-            <a:off x="896112" y="2667304"/>
-            <a:ext cx="10637215" cy="888796"/>
+            <a:off x="5742432" y="2522220"/>
+            <a:ext cx="5790895" cy="740664"/>
           </a:xfrm>
           <a:prstGeom prst="rect">
             <a:avLst/>
@@ -18668,26 +19192,26 @@
               </a:spcBef>
             </a:pPr>
             <a:r>
-              <a:rPr sz="1750" b="0">
+              <a:rPr sz="1600" b="0">
                 <a:solidFill>
                   <a:srgbClr val="0B0B0B"/>
                 </a:solidFill>
                 <a:latin typeface="Segoe UI"/>
               </a:rPr>
-              <a:t>V-01, expiration du compte Snowflake : le seul réellement bloquant</a:t>
-            </a:r>
-          </a:p>
-        </p:txBody>
-      </p:sp>
-      <p:sp>
-        <p:nvSpPr>
-          <p:cNvPr id="9" name="Rectangle 8"/>
+              <a:t>V-12 et V-13 ont été refermés le 31/08 : la feuille de route vit</a:t>
+            </a:r>
+          </a:p>
+        </p:txBody>
+      </p:sp>
+      <p:sp>
+        <p:nvSpPr>
+          <p:cNvPr id="10" name="Rectangle 9"/>
           <p:cNvSpPr/>
           <p:nvPr/>
         </p:nvSpPr>
         <p:spPr>
           <a:xfrm>
-            <a:off x="658368" y="3620109"/>
+            <a:off x="5504688" y="3329940"/>
             <a:ext cx="68580" cy="68580"/>
           </a:xfrm>
           <a:prstGeom prst="rect">
@@ -18725,14 +19249,14 @@
       </p:sp>
       <p:sp>
         <p:nvSpPr>
-          <p:cNvPr id="10" name="TextBox 9"/>
+          <p:cNvPr id="11" name="TextBox 10"/>
           <p:cNvSpPr txBox="1"/>
           <p:nvPr/>
         </p:nvSpPr>
         <p:spPr>
           <a:xfrm>
-            <a:off x="896112" y="3537813"/>
-            <a:ext cx="10637215" cy="888796"/>
+            <a:off x="5742432" y="3247644"/>
+            <a:ext cx="5790895" cy="740664"/>
           </a:xfrm>
           <a:prstGeom prst="rect">
             <a:avLst/>
@@ -18754,26 +19278,26 @@
               </a:spcBef>
             </a:pPr>
             <a:r>
-              <a:rPr sz="1750" b="0">
+              <a:rPr sz="1600" b="0">
                 <a:solidFill>
                   <a:srgbClr val="0B0B0B"/>
                 </a:solidFill>
                 <a:latin typeface="Segoe UI"/>
               </a:rPr>
-              <a:t>V-02, aucun canal de notification : l'écart le plus important avec une plateforme exploitée</a:t>
-            </a:r>
-          </a:p>
-        </p:txBody>
-      </p:sp>
-      <p:sp>
-        <p:nvSpPr>
-          <p:cNvPr id="11" name="Rectangle 10"/>
+              <a:t>V-01, expiration du compte Snowflake : le seul réellement bloquant</a:t>
+            </a:r>
+          </a:p>
+        </p:txBody>
+      </p:sp>
+      <p:sp>
+        <p:nvSpPr>
+          <p:cNvPr id="12" name="Rectangle 11"/>
           <p:cNvSpPr/>
           <p:nvPr/>
         </p:nvSpPr>
         <p:spPr>
           <a:xfrm>
-            <a:off x="658368" y="4490618"/>
+            <a:off x="5504688" y="4055364"/>
             <a:ext cx="68580" cy="68580"/>
           </a:xfrm>
           <a:prstGeom prst="rect">
@@ -18811,14 +19335,14 @@
       </p:sp>
       <p:sp>
         <p:nvSpPr>
-          <p:cNvPr id="12" name="TextBox 11"/>
+          <p:cNvPr id="13" name="TextBox 12"/>
           <p:cNvSpPr txBox="1"/>
           <p:nvPr/>
         </p:nvSpPr>
         <p:spPr>
           <a:xfrm>
-            <a:off x="896112" y="4408322"/>
-            <a:ext cx="10637215" cy="888796"/>
+            <a:off x="5742432" y="3973068"/>
+            <a:ext cx="5790895" cy="740664"/>
           </a:xfrm>
           <a:prstGeom prst="rect">
             <a:avLst/>
@@ -18840,26 +19364,26 @@
               </a:spcBef>
             </a:pPr>
             <a:r>
-              <a:rPr sz="1750" b="0">
+              <a:rPr sz="1600" b="0">
                 <a:solidFill>
                   <a:srgbClr val="0B0B0B"/>
                 </a:solidFill>
                 <a:latin typeface="Segoe UI"/>
               </a:rPr>
-              <a:t>V-03, l'utilisateur de service tourne avec des droits trop larges</a:t>
-            </a:r>
-          </a:p>
-        </p:txBody>
-      </p:sp>
-      <p:sp>
-        <p:nvSpPr>
-          <p:cNvPr id="13" name="Rectangle 12"/>
+              <a:t>V-02, aucun canal de notification : l'écart le plus important avec une plateforme exploitée</a:t>
+            </a:r>
+          </a:p>
+        </p:txBody>
+      </p:sp>
+      <p:sp>
+        <p:nvSpPr>
+          <p:cNvPr id="14" name="Rectangle 13"/>
           <p:cNvSpPr/>
           <p:nvPr/>
         </p:nvSpPr>
         <p:spPr>
           <a:xfrm>
-            <a:off x="658368" y="5361127"/>
+            <a:off x="5504688" y="4780788"/>
             <a:ext cx="68580" cy="68580"/>
           </a:xfrm>
           <a:prstGeom prst="rect">
@@ -18897,14 +19421,14 @@
       </p:sp>
       <p:sp>
         <p:nvSpPr>
-          <p:cNvPr id="14" name="TextBox 13"/>
+          <p:cNvPr id="15" name="TextBox 14"/>
           <p:cNvSpPr txBox="1"/>
           <p:nvPr/>
         </p:nvSpPr>
         <p:spPr>
           <a:xfrm>
-            <a:off x="896112" y="5278831"/>
-            <a:ext cx="10637215" cy="888796"/>
+            <a:off x="5742432" y="4698492"/>
+            <a:ext cx="5790895" cy="740664"/>
           </a:xfrm>
           <a:prstGeom prst="rect">
             <a:avLst/>
@@ -18926,27 +19450,27 @@
               </a:spcBef>
             </a:pPr>
             <a:r>
-              <a:rPr sz="1750" b="0">
+              <a:rPr sz="1600" b="0">
                 <a:solidFill>
                   <a:srgbClr val="0B0B0B"/>
                 </a:solidFill>
                 <a:latin typeface="Segoe UI"/>
               </a:rPr>
-              <a:t>COMPUTE_WH à réduire : mesuré à 32 % de la consommation au 31/08</a:t>
-            </a:r>
-          </a:p>
-        </p:txBody>
-      </p:sp>
-      <p:sp>
-        <p:nvSpPr>
-          <p:cNvPr id="15" name="Rectangle 14"/>
+              <a:t>V-03, l'utilisateur de service tourne avec des droits trop larges</a:t>
+            </a:r>
+          </a:p>
+        </p:txBody>
+      </p:sp>
+      <p:sp>
+        <p:nvSpPr>
+          <p:cNvPr id="16" name="Rectangle 15"/>
           <p:cNvSpPr/>
           <p:nvPr/>
         </p:nvSpPr>
         <p:spPr>
           <a:xfrm>
-            <a:off x="658368" y="6291072"/>
-            <a:ext cx="28000" cy="146304"/>
+            <a:off x="5504688" y="5506212"/>
+            <a:ext cx="68580" cy="68580"/>
           </a:xfrm>
           <a:prstGeom prst="rect">
             <a:avLst/>
@@ -18983,14 +19507,14 @@
       </p:sp>
       <p:sp>
         <p:nvSpPr>
-          <p:cNvPr id="16" name="TextBox 15"/>
+          <p:cNvPr id="17" name="TextBox 16"/>
           <p:cNvSpPr txBox="1"/>
           <p:nvPr/>
         </p:nvSpPr>
         <p:spPr>
           <a:xfrm>
-            <a:off x="786384" y="6254496"/>
-            <a:ext cx="8229600" cy="274320"/>
+            <a:off x="5742432" y="5423916"/>
+            <a:ext cx="5790895" cy="740664"/>
           </a:xfrm>
           <a:prstGeom prst="rect">
             <a:avLst/>
@@ -19004,6 +19528,92 @@
           <a:lstStyle/>
           <a:p>
             <a:pPr algn="l">
+              <a:lnSpc>
+                <a:spcPct val="115000"/>
+              </a:lnSpc>
+              <a:spcBef>
+                <a:spcPts val="0"/>
+              </a:spcBef>
+            </a:pPr>
+            <a:r>
+              <a:rPr sz="1600" b="0">
+                <a:solidFill>
+                  <a:srgbClr val="0B0B0B"/>
+                </a:solidFill>
+                <a:latin typeface="Segoe UI"/>
+              </a:rPr>
+              <a:t>COMPUTE_WH à réduire : mesuré à 32 % de la consommation au 31/08</a:t>
+            </a:r>
+          </a:p>
+        </p:txBody>
+      </p:sp>
+      <p:sp>
+        <p:nvSpPr>
+          <p:cNvPr id="18" name="Rectangle 17"/>
+          <p:cNvSpPr/>
+          <p:nvPr/>
+        </p:nvSpPr>
+        <p:spPr>
+          <a:xfrm>
+            <a:off x="658368" y="6291072"/>
+            <a:ext cx="28000" cy="146304"/>
+          </a:xfrm>
+          <a:prstGeom prst="rect">
+            <a:avLst/>
+          </a:prstGeom>
+          <a:solidFill>
+            <a:srgbClr val="2A78D6"/>
+          </a:solidFill>
+          <a:ln>
+            <a:noFill/>
+          </a:ln>
+          <a:effectLst/>
+        </p:spPr>
+        <p:style>
+          <a:lnRef idx="1">
+            <a:schemeClr val="accent1"/>
+          </a:lnRef>
+          <a:fillRef idx="3">
+            <a:schemeClr val="accent1"/>
+          </a:fillRef>
+          <a:effectRef idx="2">
+            <a:schemeClr val="accent1"/>
+          </a:effectRef>
+          <a:fontRef idx="minor">
+            <a:schemeClr val="lt1"/>
+          </a:fontRef>
+        </p:style>
+        <p:txBody>
+          <a:bodyPr rtlCol="0" anchor="ctr"/>
+          <a:lstStyle/>
+          <a:p>
+            <a:pPr algn="ctr"/>
+          </a:p>
+        </p:txBody>
+      </p:sp>
+      <p:sp>
+        <p:nvSpPr>
+          <p:cNvPr id="19" name="TextBox 18"/>
+          <p:cNvSpPr txBox="1"/>
+          <p:nvPr/>
+        </p:nvSpPr>
+        <p:spPr>
+          <a:xfrm>
+            <a:off x="786384" y="6254496"/>
+            <a:ext cx="8229600" cy="274320"/>
+          </a:xfrm>
+          <a:prstGeom prst="rect">
+            <a:avLst/>
+          </a:prstGeom>
+          <a:noFill/>
+        </p:spPr>
+        <p:txBody>
+          <a:bodyPr wrap="square" lIns="0" rIns="0" tIns="0" bIns="0">
+            <a:spAutoFit/>
+          </a:bodyPr>
+          <a:lstStyle/>
+          <a:p>
+            <a:pPr algn="l">
               <a:spcBef>
                 <a:spcPts val="0"/>
               </a:spcBef>
@@ -19022,7 +19632,7 @@
       </p:sp>
       <p:sp>
         <p:nvSpPr>
-          <p:cNvPr id="17" name="TextBox 16"/>
+          <p:cNvPr id="20" name="TextBox 19"/>
           <p:cNvSpPr txBox="1"/>
           <p:nvPr/>
         </p:nvSpPr>
@@ -21611,14 +22221,346 @@
       </p:sp>
       <p:sp>
         <p:nvSpPr>
-          <p:cNvPr id="6" name="Rectangle 5"/>
+          <p:cNvPr id="6" name="Rounded Rectangle 5"/>
           <p:cNvSpPr/>
           <p:nvPr/>
         </p:nvSpPr>
         <p:spPr>
           <a:xfrm>
-            <a:off x="658368" y="1879092"/>
-            <a:ext cx="68580" cy="68580"/>
+            <a:off x="658368" y="1755648"/>
+            <a:ext cx="10874959" cy="3099816"/>
+          </a:xfrm>
+          <a:prstGeom prst="roundRect">
+            <a:avLst/>
+          </a:prstGeom>
+          <a:solidFill>
+            <a:srgbClr val="F1F2F4"/>
+          </a:solidFill>
+          <a:ln w="15240">
+            <a:solidFill>
+              <a:srgbClr val="C9CED5"/>
+            </a:solidFill>
+          </a:ln>
+          <a:effectLst/>
+        </p:spPr>
+        <p:style>
+          <a:lnRef idx="1">
+            <a:schemeClr val="accent1"/>
+          </a:lnRef>
+          <a:fillRef idx="3">
+            <a:schemeClr val="accent1"/>
+          </a:fillRef>
+          <a:effectRef idx="2">
+            <a:schemeClr val="accent1"/>
+          </a:effectRef>
+          <a:fontRef idx="minor">
+            <a:schemeClr val="lt1"/>
+          </a:fontRef>
+        </p:style>
+        <p:txBody>
+          <a:bodyPr rtlCol="0" anchor="ctr"/>
+          <a:lstStyle/>
+          <a:p>
+            <a:pPr algn="ctr"/>
+          </a:p>
+        </p:txBody>
+      </p:sp>
+      <p:sp>
+        <p:nvSpPr>
+          <p:cNvPr id="7" name="TextBox 6"/>
+          <p:cNvSpPr txBox="1"/>
+          <p:nvPr/>
+        </p:nvSpPr>
+        <p:spPr>
+          <a:xfrm>
+            <a:off x="969264" y="1993392"/>
+            <a:ext cx="10253167" cy="2642616"/>
+          </a:xfrm>
+          <a:prstGeom prst="rect">
+            <a:avLst/>
+          </a:prstGeom>
+          <a:noFill/>
+        </p:spPr>
+        <p:txBody>
+          <a:bodyPr wrap="square" lIns="0" rIns="0" tIns="0" bIns="0">
+            <a:spAutoFit/>
+          </a:bodyPr>
+          <a:lstStyle/>
+          <a:p>
+            <a:pPr algn="l">
+              <a:spcBef>
+                <a:spcPts val="0"/>
+              </a:spcBef>
+            </a:pPr>
+            <a:r>
+              <a:rPr sz="1100" b="0">
+                <a:solidFill>
+                  <a:srgbClr val="0B0B0B"/>
+                </a:solidFill>
+                <a:latin typeface="Consolas"/>
+              </a:rPr>
+              <a:t>Rejeu de INC-004 : connexion applicative vers le port hote 5432,</a:t>
+            </a:r>
+          </a:p>
+          <a:p>
+            <a:pPr algn="l">
+              <a:spcBef>
+                <a:spcPts val="0"/>
+              </a:spcBef>
+            </a:pPr>
+            <a:r>
+              <a:rPr sz="1100" b="0">
+                <a:solidFill>
+                  <a:srgbClr val="0B0B0B"/>
+                </a:solidFill>
+                <a:latin typeface="Consolas"/>
+              </a:rPr>
+              <a:t>celui que le service PostgreSQL natif occupe a la place du conteneur.</a:t>
+            </a:r>
+          </a:p>
+          <a:p>
+            <a:pPr algn="l">
+              <a:spcBef>
+                <a:spcPts val="0"/>
+              </a:spcBef>
+            </a:pPr>
+            <a:r>
+              <a:rPr sz="1100" b="0">
+                <a:solidFill>
+                  <a:srgbClr val="0B0B0B"/>
+                </a:solidFill>
+                <a:latin typeface="Consolas"/>
+              </a:rPr>
+              <a:t>Traceback (most recent call last):</a:t>
+            </a:r>
+          </a:p>
+          <a:p>
+            <a:pPr algn="l">
+              <a:spcBef>
+                <a:spcPts val="0"/>
+              </a:spcBef>
+            </a:pPr>
+            <a:r>
+              <a:rPr sz="1100" b="0">
+                <a:solidFill>
+                  <a:srgbClr val="0B0B0B"/>
+                </a:solidFill>
+                <a:latin typeface="Consolas"/>
+              </a:rPr>
+              <a:t>  File "C:\Users\maelz\Downloads\Documents\Formalités_Officiels\Dossier YNOV\Certification\Bloc 4\GameLens 0\out</a:t>
+            </a:r>
+          </a:p>
+          <a:p>
+            <a:pPr algn="l">
+              <a:spcBef>
+                <a:spcPts val="0"/>
+              </a:spcBef>
+            </a:pPr>
+            <a:r>
+              <a:rPr sz="1100" b="0">
+                <a:solidFill>
+                  <a:srgbClr val="0B0B0B"/>
+                </a:solidFill>
+                <a:latin typeface="Consolas"/>
+              </a:rPr>
+              <a:t>    psycopg2.connect(host="localhost", port=5432, dbname="gamelens",</a:t>
+            </a:r>
+          </a:p>
+          <a:p>
+            <a:pPr algn="l">
+              <a:spcBef>
+                <a:spcPts val="0"/>
+              </a:spcBef>
+            </a:pPr>
+            <a:r>
+              <a:rPr sz="1100" b="0">
+                <a:solidFill>
+                  <a:srgbClr val="0B0B0B"/>
+                </a:solidFill>
+                <a:latin typeface="Consolas"/>
+              </a:rPr>
+              <a:t>  File "C:\Users\maelz\AppData\Local\Programs\Python\Python312\Lib\site-packages\psycopg2\__init__.py", line 135</a:t>
+            </a:r>
+          </a:p>
+          <a:p>
+            <a:pPr algn="l">
+              <a:spcBef>
+                <a:spcPts val="0"/>
+              </a:spcBef>
+            </a:pPr>
+            <a:r>
+              <a:rPr sz="1100" b="0">
+                <a:solidFill>
+                  <a:srgbClr val="0B0B0B"/>
+                </a:solidFill>
+                <a:latin typeface="Consolas"/>
+              </a:rPr>
+              <a:t>    conn = _connect(dsn, connection_factory=connection_factory, **kwasync)</a:t>
+            </a:r>
+          </a:p>
+          <a:p>
+            <a:pPr algn="l">
+              <a:spcBef>
+                <a:spcPts val="0"/>
+              </a:spcBef>
+            </a:pPr>
+            <a:r>
+              <a:rPr sz="1100" b="0">
+                <a:solidFill>
+                  <a:srgbClr val="0B0B0B"/>
+                </a:solidFill>
+                <a:latin typeface="Consolas"/>
+              </a:rPr>
+              <a:t>           ^^^^^^^^^^^^^^^^^^^^^^^^^^^^^^^^^^^^^^^^^^^^^^^^^^^^^^^^^^^^^^^</a:t>
+            </a:r>
+          </a:p>
+          <a:p>
+            <a:pPr algn="l">
+              <a:spcBef>
+                <a:spcPts val="0"/>
+              </a:spcBef>
+            </a:pPr>
+            <a:r>
+              <a:rPr sz="1100" b="0">
+                <a:solidFill>
+                  <a:srgbClr val="0B0B0B"/>
+                </a:solidFill>
+                <a:latin typeface="Consolas"/>
+              </a:rPr>
+              <a:t>UnicodeDecodeError: 'utf-8' codec can't decode byte 0xe9 in position 103: invalid continuation byte</a:t>
+            </a:r>
+          </a:p>
+          <a:p>
+            <a:pPr algn="l">
+              <a:spcBef>
+                <a:spcPts val="0"/>
+              </a:spcBef>
+            </a:pPr>
+            <a:r>
+              <a:rPr sz="1100" b="0">
+                <a:solidFill>
+                  <a:srgbClr val="0B0B0B"/>
+                </a:solidFill>
+                <a:latin typeface="Consolas"/>
+              </a:rPr>
+              <a:t>L'octet 0xe9 est le « e » accentue de « echouee », dans</a:t>
+            </a:r>
+          </a:p>
+          <a:p>
+            <a:pPr algn="l">
+              <a:spcBef>
+                <a:spcPts val="0"/>
+              </a:spcBef>
+            </a:pPr>
+            <a:r>
+              <a:rPr sz="1100" b="0">
+                <a:solidFill>
+                  <a:srgbClr val="0B0B0B"/>
+                </a:solidFill>
+                <a:latin typeface="Consolas"/>
+              </a:rPr>
+              <a:t>« authentification par mot de passe echouee », message rendu en</a:t>
+            </a:r>
+          </a:p>
+          <a:p>
+            <a:pPr algn="l">
+              <a:spcBef>
+                <a:spcPts val="0"/>
+              </a:spcBef>
+            </a:pPr>
+            <a:r>
+              <a:rPr sz="1100" b="0">
+                <a:solidFill>
+                  <a:srgbClr val="0B0B0B"/>
+                </a:solidFill>
+                <a:latin typeface="Consolas"/>
+              </a:rPr>
+              <a:t>francais et en cp1252 par le serveur natif. L'erreur d'authentification,</a:t>
+            </a:r>
+          </a:p>
+          <a:p>
+            <a:pPr algn="l">
+              <a:spcBef>
+                <a:spcPts val="0"/>
+              </a:spcBef>
+            </a:pPr>
+            <a:r>
+              <a:rPr sz="1100" b="0">
+                <a:solidFill>
+                  <a:srgbClr val="0B0B0B"/>
+                </a:solidFill>
+                <a:latin typeface="Consolas"/>
+              </a:rPr>
+              <a:t>seule reellement informative, est detruite par l'echec de decodage de</a:t>
+            </a:r>
+          </a:p>
+          <a:p>
+            <a:pPr algn="l">
+              <a:spcBef>
+                <a:spcPts val="0"/>
+              </a:spcBef>
+            </a:pPr>
+            <a:r>
+              <a:rPr sz="1100" b="0">
+                <a:solidFill>
+                  <a:srgbClr val="0B0B0B"/>
+                </a:solidFill>
+                <a:latin typeface="Consolas"/>
+              </a:rPr>
+              <a:t>son propre message.</a:t>
+            </a:r>
+          </a:p>
+        </p:txBody>
+      </p:sp>
+      <p:sp>
+        <p:nvSpPr>
+          <p:cNvPr id="8" name="TextBox 7"/>
+          <p:cNvSpPr txBox="1"/>
+          <p:nvPr/>
+        </p:nvSpPr>
+        <p:spPr>
+          <a:xfrm>
+            <a:off x="658368" y="5001768"/>
+            <a:ext cx="10874959" cy="274320"/>
+          </a:xfrm>
+          <a:prstGeom prst="rect">
+            <a:avLst/>
+          </a:prstGeom>
+          <a:noFill/>
+        </p:spPr>
+        <p:txBody>
+          <a:bodyPr wrap="square" lIns="0" rIns="0" tIns="0" bIns="0">
+            <a:spAutoFit/>
+          </a:bodyPr>
+          <a:lstStyle/>
+          <a:p>
+            <a:pPr algn="l">
+              <a:spcBef>
+                <a:spcPts val="0"/>
+              </a:spcBef>
+            </a:pPr>
+            <a:r>
+              <a:rPr sz="1200" b="0">
+                <a:solidFill>
+                  <a:srgbClr val="52514E"/>
+                </a:solidFill>
+                <a:latin typeface="Segoe UI"/>
+              </a:rPr>
+              <a:t>Rejoué le 01/09/2026, à l'identique : même octet 0xe9, même position 103</a:t>
+            </a:r>
+          </a:p>
+        </p:txBody>
+      </p:sp>
+      <p:sp>
+        <p:nvSpPr>
+          <p:cNvPr id="9" name="Rectangle 8"/>
+          <p:cNvSpPr/>
+          <p:nvPr/>
+        </p:nvSpPr>
+        <p:spPr>
+          <a:xfrm>
+            <a:off x="658368" y="6291072"/>
+            <a:ext cx="28000" cy="146304"/>
           </a:xfrm>
           <a:prstGeom prst="rect">
             <a:avLst/>
@@ -21655,14 +22597,14 @@
       </p:sp>
       <p:sp>
         <p:nvSpPr>
-          <p:cNvPr id="7" name="TextBox 6"/>
+          <p:cNvPr id="10" name="TextBox 9"/>
           <p:cNvSpPr txBox="1"/>
           <p:nvPr/>
         </p:nvSpPr>
         <p:spPr>
           <a:xfrm>
-            <a:off x="896112" y="1796796"/>
-            <a:ext cx="10637215" cy="888796"/>
+            <a:off x="786384" y="6254496"/>
+            <a:ext cx="8229600" cy="274320"/>
           </a:xfrm>
           <a:prstGeom prst="rect">
             <a:avLst/>
@@ -21676,455 +22618,25 @@
           <a:lstStyle/>
           <a:p>
             <a:pPr algn="l">
-              <a:lnSpc>
-                <a:spcPct val="115000"/>
-              </a:lnSpc>
-              <a:spcBef>
-                <a:spcPts val="0"/>
-              </a:spcBef>
-            </a:pPr>
-            <a:r>
-              <a:rPr sz="1750" b="0">
-                <a:solidFill>
-                  <a:srgbClr val="0B0B0B"/>
+              <a:spcBef>
+                <a:spcPts val="0"/>
+              </a:spcBef>
+            </a:pPr>
+            <a:r>
+              <a:rPr sz="900" b="0">
+                <a:solidFill>
+                  <a:srgbClr val="52514E"/>
                 </a:solidFill>
                 <a:latin typeface="Segoe UI"/>
               </a:rPr>
-              <a:t>Symptôme : UnicodeDecodeError, à l'intérieur de psycopg2.connect()</a:t>
-            </a:r>
-          </a:p>
-        </p:txBody>
-      </p:sp>
-      <p:sp>
-        <p:nvSpPr>
-          <p:cNvPr id="8" name="Rectangle 7"/>
-          <p:cNvSpPr/>
-          <p:nvPr/>
-        </p:nvSpPr>
-        <p:spPr>
-          <a:xfrm>
-            <a:off x="658368" y="2749600"/>
-            <a:ext cx="68580" cy="68580"/>
-          </a:xfrm>
-          <a:prstGeom prst="rect">
-            <a:avLst/>
-          </a:prstGeom>
-          <a:solidFill>
-            <a:srgbClr val="2A78D6"/>
-          </a:solidFill>
-          <a:ln>
-            <a:noFill/>
-          </a:ln>
-          <a:effectLst/>
-        </p:spPr>
-        <p:style>
-          <a:lnRef idx="1">
-            <a:schemeClr val="accent1"/>
-          </a:lnRef>
-          <a:fillRef idx="3">
-            <a:schemeClr val="accent1"/>
-          </a:fillRef>
-          <a:effectRef idx="2">
-            <a:schemeClr val="accent1"/>
-          </a:effectRef>
-          <a:fontRef idx="minor">
-            <a:schemeClr val="lt1"/>
-          </a:fontRef>
-        </p:style>
-        <p:txBody>
-          <a:bodyPr rtlCol="0" anchor="ctr"/>
-          <a:lstStyle/>
-          <a:p>
-            <a:pPr algn="ctr"/>
-          </a:p>
-        </p:txBody>
-      </p:sp>
-      <p:sp>
-        <p:nvSpPr>
-          <p:cNvPr id="9" name="TextBox 8"/>
-          <p:cNvSpPr txBox="1"/>
-          <p:nvPr/>
-        </p:nvSpPr>
-        <p:spPr>
-          <a:xfrm>
-            <a:off x="896112" y="2667304"/>
-            <a:ext cx="10637215" cy="888796"/>
-          </a:xfrm>
-          <a:prstGeom prst="rect">
-            <a:avLst/>
-          </a:prstGeom>
-          <a:noFill/>
-        </p:spPr>
-        <p:txBody>
-          <a:bodyPr wrap="square" lIns="0" rIns="0" tIns="0" bIns="0">
-            <a:spAutoFit/>
-          </a:bodyPr>
-          <a:lstStyle/>
-          <a:p>
-            <a:pPr algn="l">
-              <a:lnSpc>
-                <a:spcPct val="115000"/>
-              </a:lnSpc>
-              <a:spcBef>
-                <a:spcPts val="0"/>
-              </a:spcBef>
-            </a:pPr>
-            <a:r>
-              <a:rPr sz="1750" b="0">
-                <a:solidFill>
-                  <a:srgbClr val="0B0B0B"/>
-                </a:solidFill>
-                <a:latin typeface="Segoe UI"/>
-              </a:rPr>
-              <a:t>Fausse piste évidente : le projet est stocké sous un chemin accentué</a:t>
-            </a:r>
-          </a:p>
-        </p:txBody>
-      </p:sp>
-      <p:sp>
-        <p:nvSpPr>
-          <p:cNvPr id="10" name="Rectangle 9"/>
-          <p:cNvSpPr/>
-          <p:nvPr/>
-        </p:nvSpPr>
-        <p:spPr>
-          <a:xfrm>
-            <a:off x="658368" y="3620109"/>
-            <a:ext cx="68580" cy="68580"/>
-          </a:xfrm>
-          <a:prstGeom prst="rect">
-            <a:avLst/>
-          </a:prstGeom>
-          <a:solidFill>
-            <a:srgbClr val="2A78D6"/>
-          </a:solidFill>
-          <a:ln>
-            <a:noFill/>
-          </a:ln>
-          <a:effectLst/>
-        </p:spPr>
-        <p:style>
-          <a:lnRef idx="1">
-            <a:schemeClr val="accent1"/>
-          </a:lnRef>
-          <a:fillRef idx="3">
-            <a:schemeClr val="accent1"/>
-          </a:fillRef>
-          <a:effectRef idx="2">
-            <a:schemeClr val="accent1"/>
-          </a:effectRef>
-          <a:fontRef idx="minor">
-            <a:schemeClr val="lt1"/>
-          </a:fontRef>
-        </p:style>
-        <p:txBody>
-          <a:bodyPr rtlCol="0" anchor="ctr"/>
-          <a:lstStyle/>
-          <a:p>
-            <a:pPr algn="ctr"/>
+              <a:t>D27   ·   25:00   ·   C4.4.2   ·   criteres 28</a:t>
+            </a:r>
           </a:p>
         </p:txBody>
       </p:sp>
       <p:sp>
         <p:nvSpPr>
           <p:cNvPr id="11" name="TextBox 10"/>
-          <p:cNvSpPr txBox="1"/>
-          <p:nvPr/>
-        </p:nvSpPr>
-        <p:spPr>
-          <a:xfrm>
-            <a:off x="896112" y="3537813"/>
-            <a:ext cx="10637215" cy="888796"/>
-          </a:xfrm>
-          <a:prstGeom prst="rect">
-            <a:avLst/>
-          </a:prstGeom>
-          <a:noFill/>
-        </p:spPr>
-        <p:txBody>
-          <a:bodyPr wrap="square" lIns="0" rIns="0" tIns="0" bIns="0">
-            <a:spAutoFit/>
-          </a:bodyPr>
-          <a:lstStyle/>
-          <a:p>
-            <a:pPr algn="l">
-              <a:lnSpc>
-                <a:spcPct val="115000"/>
-              </a:lnSpc>
-              <a:spcBef>
-                <a:spcPts val="0"/>
-              </a:spcBef>
-            </a:pPr>
-            <a:r>
-              <a:rPr sz="1750" b="0">
-                <a:solidFill>
-                  <a:srgbClr val="0B0B0B"/>
-                </a:solidFill>
-                <a:latin typeface="Segoe UI"/>
-              </a:rPr>
-              <a:t>Cause réelle : un PostgreSQL natif occupait déjà le port 5432</a:t>
-            </a:r>
-          </a:p>
-        </p:txBody>
-      </p:sp>
-      <p:sp>
-        <p:nvSpPr>
-          <p:cNvPr id="12" name="Rectangle 11"/>
-          <p:cNvSpPr/>
-          <p:nvPr/>
-        </p:nvSpPr>
-        <p:spPr>
-          <a:xfrm>
-            <a:off x="658368" y="4490618"/>
-            <a:ext cx="68580" cy="68580"/>
-          </a:xfrm>
-          <a:prstGeom prst="rect">
-            <a:avLst/>
-          </a:prstGeom>
-          <a:solidFill>
-            <a:srgbClr val="2A78D6"/>
-          </a:solidFill>
-          <a:ln>
-            <a:noFill/>
-          </a:ln>
-          <a:effectLst/>
-        </p:spPr>
-        <p:style>
-          <a:lnRef idx="1">
-            <a:schemeClr val="accent1"/>
-          </a:lnRef>
-          <a:fillRef idx="3">
-            <a:schemeClr val="accent1"/>
-          </a:fillRef>
-          <a:effectRef idx="2">
-            <a:schemeClr val="accent1"/>
-          </a:effectRef>
-          <a:fontRef idx="minor">
-            <a:schemeClr val="lt1"/>
-          </a:fontRef>
-        </p:style>
-        <p:txBody>
-          <a:bodyPr rtlCol="0" anchor="ctr"/>
-          <a:lstStyle/>
-          <a:p>
-            <a:pPr algn="ctr"/>
-          </a:p>
-        </p:txBody>
-      </p:sp>
-      <p:sp>
-        <p:nvSpPr>
-          <p:cNvPr id="13" name="TextBox 12"/>
-          <p:cNvSpPr txBox="1"/>
-          <p:nvPr/>
-        </p:nvSpPr>
-        <p:spPr>
-          <a:xfrm>
-            <a:off x="896112" y="4408322"/>
-            <a:ext cx="10637215" cy="888796"/>
-          </a:xfrm>
-          <a:prstGeom prst="rect">
-            <a:avLst/>
-          </a:prstGeom>
-          <a:noFill/>
-        </p:spPr>
-        <p:txBody>
-          <a:bodyPr wrap="square" lIns="0" rIns="0" tIns="0" bIns="0">
-            <a:spAutoFit/>
-          </a:bodyPr>
-          <a:lstStyle/>
-          <a:p>
-            <a:pPr algn="l">
-              <a:lnSpc>
-                <a:spcPct val="115000"/>
-              </a:lnSpc>
-              <a:spcBef>
-                <a:spcPts val="0"/>
-              </a:spcBef>
-            </a:pPr>
-            <a:r>
-              <a:rPr sz="1750" b="0">
-                <a:solidFill>
-                  <a:srgbClr val="0B0B0B"/>
-                </a:solidFill>
-                <a:latin typeface="Segoe UI"/>
-              </a:rPr>
-              <a:t>Docker publiait le port sans effet réel, et sans le moindre message d'erreur</a:t>
-            </a:r>
-          </a:p>
-        </p:txBody>
-      </p:sp>
-      <p:sp>
-        <p:nvSpPr>
-          <p:cNvPr id="14" name="Rectangle 13"/>
-          <p:cNvSpPr/>
-          <p:nvPr/>
-        </p:nvSpPr>
-        <p:spPr>
-          <a:xfrm>
-            <a:off x="658368" y="5361127"/>
-            <a:ext cx="68580" cy="68580"/>
-          </a:xfrm>
-          <a:prstGeom prst="rect">
-            <a:avLst/>
-          </a:prstGeom>
-          <a:solidFill>
-            <a:srgbClr val="2A78D6"/>
-          </a:solidFill>
-          <a:ln>
-            <a:noFill/>
-          </a:ln>
-          <a:effectLst/>
-        </p:spPr>
-        <p:style>
-          <a:lnRef idx="1">
-            <a:schemeClr val="accent1"/>
-          </a:lnRef>
-          <a:fillRef idx="3">
-            <a:schemeClr val="accent1"/>
-          </a:fillRef>
-          <a:effectRef idx="2">
-            <a:schemeClr val="accent1"/>
-          </a:effectRef>
-          <a:fontRef idx="minor">
-            <a:schemeClr val="lt1"/>
-          </a:fontRef>
-        </p:style>
-        <p:txBody>
-          <a:bodyPr rtlCol="0" anchor="ctr"/>
-          <a:lstStyle/>
-          <a:p>
-            <a:pPr algn="ctr"/>
-          </a:p>
-        </p:txBody>
-      </p:sp>
-      <p:sp>
-        <p:nvSpPr>
-          <p:cNvPr id="15" name="TextBox 14"/>
-          <p:cNvSpPr txBox="1"/>
-          <p:nvPr/>
-        </p:nvSpPr>
-        <p:spPr>
-          <a:xfrm>
-            <a:off x="896112" y="5278831"/>
-            <a:ext cx="10637215" cy="888796"/>
-          </a:xfrm>
-          <a:prstGeom prst="rect">
-            <a:avLst/>
-          </a:prstGeom>
-          <a:noFill/>
-        </p:spPr>
-        <p:txBody>
-          <a:bodyPr wrap="square" lIns="0" rIns="0" tIns="0" bIns="0">
-            <a:spAutoFit/>
-          </a:bodyPr>
-          <a:lstStyle/>
-          <a:p>
-            <a:pPr algn="l">
-              <a:lnSpc>
-                <a:spcPct val="115000"/>
-              </a:lnSpc>
-              <a:spcBef>
-                <a:spcPts val="0"/>
-              </a:spcBef>
-            </a:pPr>
-            <a:r>
-              <a:rPr sz="1750" b="0">
-                <a:solidFill>
-                  <a:srgbClr val="0B0B0B"/>
-                </a:solidFill>
-                <a:latin typeface="Segoe UI"/>
-              </a:rPr>
-              <a:t>L'erreur d'authentification, seule informative, a été détruite par l'échec de décodage de son propre message</a:t>
-            </a:r>
-          </a:p>
-        </p:txBody>
-      </p:sp>
-      <p:sp>
-        <p:nvSpPr>
-          <p:cNvPr id="16" name="Rectangle 15"/>
-          <p:cNvSpPr/>
-          <p:nvPr/>
-        </p:nvSpPr>
-        <p:spPr>
-          <a:xfrm>
-            <a:off x="658368" y="6291072"/>
-            <a:ext cx="28000" cy="146304"/>
-          </a:xfrm>
-          <a:prstGeom prst="rect">
-            <a:avLst/>
-          </a:prstGeom>
-          <a:solidFill>
-            <a:srgbClr val="2A78D6"/>
-          </a:solidFill>
-          <a:ln>
-            <a:noFill/>
-          </a:ln>
-          <a:effectLst/>
-        </p:spPr>
-        <p:style>
-          <a:lnRef idx="1">
-            <a:schemeClr val="accent1"/>
-          </a:lnRef>
-          <a:fillRef idx="3">
-            <a:schemeClr val="accent1"/>
-          </a:fillRef>
-          <a:effectRef idx="2">
-            <a:schemeClr val="accent1"/>
-          </a:effectRef>
-          <a:fontRef idx="minor">
-            <a:schemeClr val="lt1"/>
-          </a:fontRef>
-        </p:style>
-        <p:txBody>
-          <a:bodyPr rtlCol="0" anchor="ctr"/>
-          <a:lstStyle/>
-          <a:p>
-            <a:pPr algn="ctr"/>
-          </a:p>
-        </p:txBody>
-      </p:sp>
-      <p:sp>
-        <p:nvSpPr>
-          <p:cNvPr id="17" name="TextBox 16"/>
-          <p:cNvSpPr txBox="1"/>
-          <p:nvPr/>
-        </p:nvSpPr>
-        <p:spPr>
-          <a:xfrm>
-            <a:off x="786384" y="6254496"/>
-            <a:ext cx="8229600" cy="274320"/>
-          </a:xfrm>
-          <a:prstGeom prst="rect">
-            <a:avLst/>
-          </a:prstGeom>
-          <a:noFill/>
-        </p:spPr>
-        <p:txBody>
-          <a:bodyPr wrap="square" lIns="0" rIns="0" tIns="0" bIns="0">
-            <a:spAutoFit/>
-          </a:bodyPr>
-          <a:lstStyle/>
-          <a:p>
-            <a:pPr algn="l">
-              <a:spcBef>
-                <a:spcPts val="0"/>
-              </a:spcBef>
-            </a:pPr>
-            <a:r>
-              <a:rPr sz="900" b="0">
-                <a:solidFill>
-                  <a:srgbClr val="52514E"/>
-                </a:solidFill>
-                <a:latin typeface="Segoe UI"/>
-              </a:rPr>
-              <a:t>D27   ·   25:00   ·   C4.4.2   ·   criteres 28</a:t>
-            </a:r>
-          </a:p>
-        </p:txBody>
-      </p:sp>
-      <p:sp>
-        <p:nvSpPr>
-          <p:cNvPr id="18" name="TextBox 17"/>
           <p:cNvSpPr txBox="1"/>
           <p:nvPr/>
         </p:nvSpPr>
@@ -22306,16 +22818,79 @@
           </a:p>
         </p:txBody>
       </p:sp>
-      <p:sp>
-        <p:nvSpPr>
-          <p:cNvPr id="5" name="Rectangle 4"/>
+      <p:pic>
+        <p:nvPicPr>
+          <p:cNvPr id="5" name="Picture 4" descr="visuel_investigation.png"/>
+          <p:cNvPicPr>
+            <a:picLocks noChangeAspect="1"/>
+          </p:cNvPicPr>
+          <p:nvPr/>
+        </p:nvPicPr>
+        <p:blipFill>
+          <a:blip r:embed="rId2"/>
+          <a:stretch>
+            <a:fillRect/>
+          </a:stretch>
+        </p:blipFill>
+        <p:spPr>
+          <a:xfrm>
+            <a:off x="1818415" y="1755648"/>
+            <a:ext cx="8554865" cy="4059936"/>
+          </a:xfrm>
+          <a:prstGeom prst="rect">
+            <a:avLst/>
+          </a:prstGeom>
+        </p:spPr>
+      </p:pic>
+      <p:sp>
+        <p:nvSpPr>
+          <p:cNvPr id="6" name="TextBox 5"/>
+          <p:cNvSpPr txBox="1"/>
+          <p:nvPr/>
+        </p:nvSpPr>
+        <p:spPr>
+          <a:xfrm>
+            <a:off x="658368" y="5888736"/>
+            <a:ext cx="10874959" cy="310896"/>
+          </a:xfrm>
+          <a:prstGeom prst="rect">
+            <a:avLst/>
+          </a:prstGeom>
+          <a:noFill/>
+        </p:spPr>
+        <p:txBody>
+          <a:bodyPr wrap="square" lIns="0" rIns="0" tIns="0" bIns="0">
+            <a:spAutoFit/>
+          </a:bodyPr>
+          <a:lstStyle/>
+          <a:p>
+            <a:pPr algn="l">
+              <a:spcBef>
+                <a:spcPts val="0"/>
+              </a:spcBef>
+            </a:pPr>
+            <a:r>
+              <a:rPr sz="1300" b="0">
+                <a:solidFill>
+                  <a:srgbClr val="52514E"/>
+                </a:solidFill>
+                <a:latin typeface="Segoe UI"/>
+              </a:rPr>
+              <a:t>Cinq étapes, deux hypothèses écartées, et celle qui a tranché</a:t>
+            </a:r>
+          </a:p>
+        </p:txBody>
+      </p:sp>
+      <p:sp>
+        <p:nvSpPr>
+          <p:cNvPr id="7" name="Rectangle 6"/>
           <p:cNvSpPr/>
           <p:nvPr/>
         </p:nvSpPr>
         <p:spPr>
           <a:xfrm>
-            <a:off x="658368" y="1879092"/>
-            <a:ext cx="68580" cy="68580"/>
+            <a:off x="658368" y="6291072"/>
+            <a:ext cx="28000" cy="146304"/>
           </a:xfrm>
           <a:prstGeom prst="rect">
             <a:avLst/>
@@ -22352,14 +22927,14 @@
       </p:sp>
       <p:sp>
         <p:nvSpPr>
-          <p:cNvPr id="6" name="TextBox 5"/>
+          <p:cNvPr id="8" name="TextBox 7"/>
           <p:cNvSpPr txBox="1"/>
           <p:nvPr/>
         </p:nvSpPr>
         <p:spPr>
           <a:xfrm>
-            <a:off x="896112" y="1796796"/>
-            <a:ext cx="10637215" cy="740664"/>
+            <a:off x="786384" y="6254496"/>
+            <a:ext cx="8229600" cy="274320"/>
           </a:xfrm>
           <a:prstGeom prst="rect">
             <a:avLst/>
@@ -22373,533 +22948,17 @@
           <a:lstStyle/>
           <a:p>
             <a:pPr algn="l">
-              <a:lnSpc>
-                <a:spcPct val="115000"/>
-              </a:lnSpc>
-              <a:spcBef>
-                <a:spcPts val="0"/>
-              </a:spcBef>
-            </a:pPr>
-            <a:r>
-              <a:rPr sz="1750" b="0">
-                <a:solidFill>
-                  <a:srgbClr val="0B0B0B"/>
+              <a:spcBef>
+                <a:spcPts val="0"/>
+              </a:spcBef>
+            </a:pPr>
+            <a:r>
+              <a:rPr sz="900" b="0">
+                <a:solidFill>
+                  <a:srgbClr val="52514E"/>
                 </a:solidFill>
                 <a:latin typeface="Segoe UI"/>
               </a:rPr>
-              <a:t>Cinq hypothèses testées, trois écartées, chacune avec sa vérification</a:t>
-            </a:r>
-          </a:p>
-        </p:txBody>
-      </p:sp>
-      <p:sp>
-        <p:nvSpPr>
-          <p:cNvPr id="7" name="Rectangle 6"/>
-          <p:cNvSpPr/>
-          <p:nvPr/>
-        </p:nvSpPr>
-        <p:spPr>
-          <a:xfrm>
-            <a:off x="658368" y="2604516"/>
-            <a:ext cx="68580" cy="68580"/>
-          </a:xfrm>
-          <a:prstGeom prst="rect">
-            <a:avLst/>
-          </a:prstGeom>
-          <a:solidFill>
-            <a:srgbClr val="2A78D6"/>
-          </a:solidFill>
-          <a:ln>
-            <a:noFill/>
-          </a:ln>
-          <a:effectLst/>
-        </p:spPr>
-        <p:style>
-          <a:lnRef idx="1">
-            <a:schemeClr val="accent1"/>
-          </a:lnRef>
-          <a:fillRef idx="3">
-            <a:schemeClr val="accent1"/>
-          </a:fillRef>
-          <a:effectRef idx="2">
-            <a:schemeClr val="accent1"/>
-          </a:effectRef>
-          <a:fontRef idx="minor">
-            <a:schemeClr val="lt1"/>
-          </a:fontRef>
-        </p:style>
-        <p:txBody>
-          <a:bodyPr rtlCol="0" anchor="ctr"/>
-          <a:lstStyle/>
-          <a:p>
-            <a:pPr algn="ctr"/>
-          </a:p>
-        </p:txBody>
-      </p:sp>
-      <p:sp>
-        <p:nvSpPr>
-          <p:cNvPr id="8" name="TextBox 7"/>
-          <p:cNvSpPr txBox="1"/>
-          <p:nvPr/>
-        </p:nvSpPr>
-        <p:spPr>
-          <a:xfrm>
-            <a:off x="896112" y="2522220"/>
-            <a:ext cx="10637215" cy="740664"/>
-          </a:xfrm>
-          <a:prstGeom prst="rect">
-            <a:avLst/>
-          </a:prstGeom>
-          <a:noFill/>
-        </p:spPr>
-        <p:txBody>
-          <a:bodyPr wrap="square" lIns="0" rIns="0" tIns="0" bIns="0">
-            <a:spAutoFit/>
-          </a:bodyPr>
-          <a:lstStyle/>
-          <a:p>
-            <a:pPr algn="l">
-              <a:lnSpc>
-                <a:spcPct val="115000"/>
-              </a:lnSpc>
-              <a:spcBef>
-                <a:spcPts val="0"/>
-              </a:spcBef>
-            </a:pPr>
-            <a:r>
-              <a:rPr sz="1750" b="0">
-                <a:solidFill>
-                  <a:srgbClr val="0B0B0B"/>
-                </a:solidFill>
-                <a:latin typeface="Segoe UI"/>
-              </a:rPr>
-              <a:t>Ce qui a tranché : la LANGUE du message d'erreur</a:t>
-            </a:r>
-          </a:p>
-        </p:txBody>
-      </p:sp>
-      <p:sp>
-        <p:nvSpPr>
-          <p:cNvPr id="9" name="Rectangle 8"/>
-          <p:cNvSpPr/>
-          <p:nvPr/>
-        </p:nvSpPr>
-        <p:spPr>
-          <a:xfrm>
-            <a:off x="658368" y="3329940"/>
-            <a:ext cx="68580" cy="68580"/>
-          </a:xfrm>
-          <a:prstGeom prst="rect">
-            <a:avLst/>
-          </a:prstGeom>
-          <a:solidFill>
-            <a:srgbClr val="2A78D6"/>
-          </a:solidFill>
-          <a:ln>
-            <a:noFill/>
-          </a:ln>
-          <a:effectLst/>
-        </p:spPr>
-        <p:style>
-          <a:lnRef idx="1">
-            <a:schemeClr val="accent1"/>
-          </a:lnRef>
-          <a:fillRef idx="3">
-            <a:schemeClr val="accent1"/>
-          </a:fillRef>
-          <a:effectRef idx="2">
-            <a:schemeClr val="accent1"/>
-          </a:effectRef>
-          <a:fontRef idx="minor">
-            <a:schemeClr val="lt1"/>
-          </a:fontRef>
-        </p:style>
-        <p:txBody>
-          <a:bodyPr rtlCol="0" anchor="ctr"/>
-          <a:lstStyle/>
-          <a:p>
-            <a:pPr algn="ctr"/>
-          </a:p>
-        </p:txBody>
-      </p:sp>
-      <p:sp>
-        <p:nvSpPr>
-          <p:cNvPr id="10" name="TextBox 9"/>
-          <p:cNvSpPr txBox="1"/>
-          <p:nvPr/>
-        </p:nvSpPr>
-        <p:spPr>
-          <a:xfrm>
-            <a:off x="896112" y="3247644"/>
-            <a:ext cx="10637215" cy="740664"/>
-          </a:xfrm>
-          <a:prstGeom prst="rect">
-            <a:avLst/>
-          </a:prstGeom>
-          <a:noFill/>
-        </p:spPr>
-        <p:txBody>
-          <a:bodyPr wrap="square" lIns="0" rIns="0" tIns="0" bIns="0">
-            <a:spAutoFit/>
-          </a:bodyPr>
-          <a:lstStyle/>
-          <a:p>
-            <a:pPr algn="l">
-              <a:lnSpc>
-                <a:spcPct val="115000"/>
-              </a:lnSpc>
-              <a:spcBef>
-                <a:spcPts val="0"/>
-              </a:spcBef>
-            </a:pPr>
-            <a:r>
-              <a:rPr sz="1750" b="0">
-                <a:solidFill>
-                  <a:srgbClr val="0B0B0B"/>
-                </a:solidFill>
-                <a:latin typeface="Segoe UI"/>
-              </a:rPr>
-              <a:t>L'image du conteneur est une Alpine en locale C : elle ne peut répondre qu'en anglais ASCII</a:t>
-            </a:r>
-          </a:p>
-        </p:txBody>
-      </p:sp>
-      <p:sp>
-        <p:nvSpPr>
-          <p:cNvPr id="11" name="Rectangle 10"/>
-          <p:cNvSpPr/>
-          <p:nvPr/>
-        </p:nvSpPr>
-        <p:spPr>
-          <a:xfrm>
-            <a:off x="658368" y="4055364"/>
-            <a:ext cx="68580" cy="68580"/>
-          </a:xfrm>
-          <a:prstGeom prst="rect">
-            <a:avLst/>
-          </a:prstGeom>
-          <a:solidFill>
-            <a:srgbClr val="2A78D6"/>
-          </a:solidFill>
-          <a:ln>
-            <a:noFill/>
-          </a:ln>
-          <a:effectLst/>
-        </p:spPr>
-        <p:style>
-          <a:lnRef idx="1">
-            <a:schemeClr val="accent1"/>
-          </a:lnRef>
-          <a:fillRef idx="3">
-            <a:schemeClr val="accent1"/>
-          </a:fillRef>
-          <a:effectRef idx="2">
-            <a:schemeClr val="accent1"/>
-          </a:effectRef>
-          <a:fontRef idx="minor">
-            <a:schemeClr val="lt1"/>
-          </a:fontRef>
-        </p:style>
-        <p:txBody>
-          <a:bodyPr rtlCol="0" anchor="ctr"/>
-          <a:lstStyle/>
-          <a:p>
-            <a:pPr algn="ctr"/>
-          </a:p>
-        </p:txBody>
-      </p:sp>
-      <p:sp>
-        <p:nvSpPr>
-          <p:cNvPr id="12" name="TextBox 11"/>
-          <p:cNvSpPr txBox="1"/>
-          <p:nvPr/>
-        </p:nvSpPr>
-        <p:spPr>
-          <a:xfrm>
-            <a:off x="896112" y="3973068"/>
-            <a:ext cx="10637215" cy="740664"/>
-          </a:xfrm>
-          <a:prstGeom prst="rect">
-            <a:avLst/>
-          </a:prstGeom>
-          <a:noFill/>
-        </p:spPr>
-        <p:txBody>
-          <a:bodyPr wrap="square" lIns="0" rIns="0" tIns="0" bIns="0">
-            <a:spAutoFit/>
-          </a:bodyPr>
-          <a:lstStyle/>
-          <a:p>
-            <a:pPr algn="l">
-              <a:lnSpc>
-                <a:spcPct val="115000"/>
-              </a:lnSpc>
-              <a:spcBef>
-                <a:spcPts val="0"/>
-              </a:spcBef>
-            </a:pPr>
-            <a:r>
-              <a:rPr sz="1750" b="0">
-                <a:solidFill>
-                  <a:srgbClr val="0B0B0B"/>
-                </a:solidFill>
-                <a:latin typeface="Segoe UI"/>
-              </a:rPr>
-              <a:t>Un message en français accentué prouvait donc que l'interlocuteur n'était pas le conteneur</a:t>
-            </a:r>
-          </a:p>
-        </p:txBody>
-      </p:sp>
-      <p:sp>
-        <p:nvSpPr>
-          <p:cNvPr id="13" name="Rectangle 12"/>
-          <p:cNvSpPr/>
-          <p:nvPr/>
-        </p:nvSpPr>
-        <p:spPr>
-          <a:xfrm>
-            <a:off x="658368" y="4780788"/>
-            <a:ext cx="68580" cy="68580"/>
-          </a:xfrm>
-          <a:prstGeom prst="rect">
-            <a:avLst/>
-          </a:prstGeom>
-          <a:solidFill>
-            <a:srgbClr val="2A78D6"/>
-          </a:solidFill>
-          <a:ln>
-            <a:noFill/>
-          </a:ln>
-          <a:effectLst/>
-        </p:spPr>
-        <p:style>
-          <a:lnRef idx="1">
-            <a:schemeClr val="accent1"/>
-          </a:lnRef>
-          <a:fillRef idx="3">
-            <a:schemeClr val="accent1"/>
-          </a:fillRef>
-          <a:effectRef idx="2">
-            <a:schemeClr val="accent1"/>
-          </a:effectRef>
-          <a:fontRef idx="minor">
-            <a:schemeClr val="lt1"/>
-          </a:fontRef>
-        </p:style>
-        <p:txBody>
-          <a:bodyPr rtlCol="0" anchor="ctr"/>
-          <a:lstStyle/>
-          <a:p>
-            <a:pPr algn="ctr"/>
-          </a:p>
-        </p:txBody>
-      </p:sp>
-      <p:sp>
-        <p:nvSpPr>
-          <p:cNvPr id="14" name="TextBox 13"/>
-          <p:cNvSpPr txBox="1"/>
-          <p:nvPr/>
-        </p:nvSpPr>
-        <p:spPr>
-          <a:xfrm>
-            <a:off x="896112" y="4698492"/>
-            <a:ext cx="10637215" cy="740664"/>
-          </a:xfrm>
-          <a:prstGeom prst="rect">
-            <a:avLst/>
-          </a:prstGeom>
-          <a:noFill/>
-        </p:spPr>
-        <p:txBody>
-          <a:bodyPr wrap="square" lIns="0" rIns="0" tIns="0" bIns="0">
-            <a:spAutoFit/>
-          </a:bodyPr>
-          <a:lstStyle/>
-          <a:p>
-            <a:pPr algn="l">
-              <a:lnSpc>
-                <a:spcPct val="115000"/>
-              </a:lnSpc>
-              <a:spcBef>
-                <a:spcPts val="0"/>
-              </a:spcBef>
-            </a:pPr>
-            <a:r>
-              <a:rPr sz="1750" b="0">
-                <a:solidFill>
-                  <a:srgbClr val="0B0B0B"/>
-                </a:solidFill>
-                <a:latin typeface="Segoe UI"/>
-              </a:rPr>
-              <a:t>Trois scénarios de correction pesés, dont deux écartés pour leurs effets de bord</a:t>
-            </a:r>
-          </a:p>
-        </p:txBody>
-      </p:sp>
-      <p:sp>
-        <p:nvSpPr>
-          <p:cNvPr id="15" name="Rectangle 14"/>
-          <p:cNvSpPr/>
-          <p:nvPr/>
-        </p:nvSpPr>
-        <p:spPr>
-          <a:xfrm>
-            <a:off x="658368" y="5506212"/>
-            <a:ext cx="68580" cy="68580"/>
-          </a:xfrm>
-          <a:prstGeom prst="rect">
-            <a:avLst/>
-          </a:prstGeom>
-          <a:solidFill>
-            <a:srgbClr val="2A78D6"/>
-          </a:solidFill>
-          <a:ln>
-            <a:noFill/>
-          </a:ln>
-          <a:effectLst/>
-        </p:spPr>
-        <p:style>
-          <a:lnRef idx="1">
-            <a:schemeClr val="accent1"/>
-          </a:lnRef>
-          <a:fillRef idx="3">
-            <a:schemeClr val="accent1"/>
-          </a:fillRef>
-          <a:effectRef idx="2">
-            <a:schemeClr val="accent1"/>
-          </a:effectRef>
-          <a:fontRef idx="minor">
-            <a:schemeClr val="lt1"/>
-          </a:fontRef>
-        </p:style>
-        <p:txBody>
-          <a:bodyPr rtlCol="0" anchor="ctr"/>
-          <a:lstStyle/>
-          <a:p>
-            <a:pPr algn="ctr"/>
-          </a:p>
-        </p:txBody>
-      </p:sp>
-      <p:sp>
-        <p:nvSpPr>
-          <p:cNvPr id="16" name="TextBox 15"/>
-          <p:cNvSpPr txBox="1"/>
-          <p:nvPr/>
-        </p:nvSpPr>
-        <p:spPr>
-          <a:xfrm>
-            <a:off x="896112" y="5423916"/>
-            <a:ext cx="10637215" cy="740664"/>
-          </a:xfrm>
-          <a:prstGeom prst="rect">
-            <a:avLst/>
-          </a:prstGeom>
-          <a:noFill/>
-        </p:spPr>
-        <p:txBody>
-          <a:bodyPr wrap="square" lIns="0" rIns="0" tIns="0" bIns="0">
-            <a:spAutoFit/>
-          </a:bodyPr>
-          <a:lstStyle/>
-          <a:p>
-            <a:pPr algn="l">
-              <a:lnSpc>
-                <a:spcPct val="115000"/>
-              </a:lnSpc>
-              <a:spcBef>
-                <a:spcPts val="0"/>
-              </a:spcBef>
-            </a:pPr>
-            <a:r>
-              <a:rPr sz="1750" b="0">
-                <a:solidFill>
-                  <a:srgbClr val="0B0B0B"/>
-                </a:solidFill>
-                <a:latin typeface="Segoe UI"/>
-              </a:rPr>
-              <a:t>Retenu : publier sur le port hôte 5433, et écrire dans le fichier pourquoi ce n'est pas 5432</a:t>
-            </a:r>
-          </a:p>
-        </p:txBody>
-      </p:sp>
-      <p:sp>
-        <p:nvSpPr>
-          <p:cNvPr id="17" name="Rectangle 16"/>
-          <p:cNvSpPr/>
-          <p:nvPr/>
-        </p:nvSpPr>
-        <p:spPr>
-          <a:xfrm>
-            <a:off x="658368" y="6291072"/>
-            <a:ext cx="28000" cy="146304"/>
-          </a:xfrm>
-          <a:prstGeom prst="rect">
-            <a:avLst/>
-          </a:prstGeom>
-          <a:solidFill>
-            <a:srgbClr val="2A78D6"/>
-          </a:solidFill>
-          <a:ln>
-            <a:noFill/>
-          </a:ln>
-          <a:effectLst/>
-        </p:spPr>
-        <p:style>
-          <a:lnRef idx="1">
-            <a:schemeClr val="accent1"/>
-          </a:lnRef>
-          <a:fillRef idx="3">
-            <a:schemeClr val="accent1"/>
-          </a:fillRef>
-          <a:effectRef idx="2">
-            <a:schemeClr val="accent1"/>
-          </a:effectRef>
-          <a:fontRef idx="minor">
-            <a:schemeClr val="lt1"/>
-          </a:fontRef>
-        </p:style>
-        <p:txBody>
-          <a:bodyPr rtlCol="0" anchor="ctr"/>
-          <a:lstStyle/>
-          <a:p>
-            <a:pPr algn="ctr"/>
-          </a:p>
-        </p:txBody>
-      </p:sp>
-      <p:sp>
-        <p:nvSpPr>
-          <p:cNvPr id="18" name="TextBox 17"/>
-          <p:cNvSpPr txBox="1"/>
-          <p:nvPr/>
-        </p:nvSpPr>
-        <p:spPr>
-          <a:xfrm>
-            <a:off x="786384" y="6254496"/>
-            <a:ext cx="8229600" cy="274320"/>
-          </a:xfrm>
-          <a:prstGeom prst="rect">
-            <a:avLst/>
-          </a:prstGeom>
-          <a:noFill/>
-        </p:spPr>
-        <p:txBody>
-          <a:bodyPr wrap="square" lIns="0" rIns="0" tIns="0" bIns="0">
-            <a:spAutoFit/>
-          </a:bodyPr>
-          <a:lstStyle/>
-          <a:p>
-            <a:pPr algn="l">
-              <a:spcBef>
-                <a:spcPts val="0"/>
-              </a:spcBef>
-            </a:pPr>
-            <a:r>
-              <a:rPr sz="900" b="0">
-                <a:solidFill>
-                  <a:srgbClr val="52514E"/>
-                </a:solidFill>
-                <a:latin typeface="Segoe UI"/>
-              </a:rPr>
               <a:t>D28   ·   26:00   ·   C4.4.2   ·   criteres 29, 30, 31</a:t>
             </a:r>
           </a:p>
@@ -22907,7 +22966,7 @@
       </p:sp>
       <p:sp>
         <p:nvSpPr>
-          <p:cNvPr id="19" name="TextBox 18"/>
+          <p:cNvPr id="9" name="TextBox 8"/>
           <p:cNvSpPr txBox="1"/>
           <p:nvPr/>
         </p:nvSpPr>
@@ -23130,13 +23189,68 @@
       </p:sp>
       <p:sp>
         <p:nvSpPr>
-          <p:cNvPr id="6" name="Rectangle 5"/>
+          <p:cNvPr id="6" name="TextBox 5"/>
+          <p:cNvSpPr txBox="1"/>
+          <p:nvPr/>
+        </p:nvSpPr>
+        <p:spPr>
+          <a:xfrm>
+            <a:off x="658368" y="2029968"/>
+            <a:ext cx="4297680" cy="2011680"/>
+          </a:xfrm>
+          <a:prstGeom prst="rect">
+            <a:avLst/>
+          </a:prstGeom>
+          <a:noFill/>
+        </p:spPr>
+        <p:txBody>
+          <a:bodyPr wrap="square" lIns="0" rIns="0" tIns="0" bIns="0">
+            <a:spAutoFit/>
+          </a:bodyPr>
+          <a:lstStyle/>
+          <a:p>
+            <a:pPr algn="l">
+              <a:spcBef>
+                <a:spcPts val="0"/>
+              </a:spcBef>
+            </a:pPr>
+            <a:r>
+              <a:rPr sz="7600" b="1">
+                <a:solidFill>
+                  <a:srgbClr val="0B0B0B"/>
+                </a:solidFill>
+                <a:latin typeface="Segoe UI"/>
+              </a:rPr>
+              <a:t>6 j 20 h</a:t>
+            </a:r>
+          </a:p>
+          <a:p>
+            <a:pPr algn="l">
+              <a:spcBef>
+                <a:spcPts val="600"/>
+              </a:spcBef>
+            </a:pPr>
+            <a:r>
+              <a:rPr sz="1400" b="0">
+                <a:solidFill>
+                  <a:srgbClr val="52514E"/>
+                </a:solidFill>
+                <a:latin typeface="Segoe UI"/>
+              </a:rPr>
+              <a:t>une alerte de fraîcheur restée ouverte en août, sans que personne ne soit prévenu</a:t>
+            </a:r>
+          </a:p>
+        </p:txBody>
+      </p:sp>
+      <p:sp>
+        <p:nvSpPr>
+          <p:cNvPr id="7" name="Rectangle 6"/>
           <p:cNvSpPr/>
           <p:nvPr/>
         </p:nvSpPr>
         <p:spPr>
           <a:xfrm>
-            <a:off x="658368" y="1879092"/>
+            <a:off x="5504688" y="1879092"/>
             <a:ext cx="68580" cy="68580"/>
           </a:xfrm>
           <a:prstGeom prst="rect">
@@ -23174,14 +23288,14 @@
       </p:sp>
       <p:sp>
         <p:nvSpPr>
-          <p:cNvPr id="7" name="TextBox 6"/>
+          <p:cNvPr id="8" name="TextBox 7"/>
           <p:cNvSpPr txBox="1"/>
           <p:nvPr/>
         </p:nvSpPr>
         <p:spPr>
           <a:xfrm>
-            <a:off x="896112" y="1796796"/>
-            <a:ext cx="10637215" cy="1110996"/>
+            <a:off x="5742432" y="1796796"/>
+            <a:ext cx="5790895" cy="1110996"/>
           </a:xfrm>
           <a:prstGeom prst="rect">
             <a:avLst/>
@@ -23203,7 +23317,7 @@
               </a:spcBef>
             </a:pPr>
             <a:r>
-              <a:rPr sz="1750" b="0">
+              <a:rPr sz="1600" b="0">
                 <a:solidFill>
                   <a:srgbClr val="0B0B0B"/>
                 </a:solidFill>
@@ -23216,13 +23330,13 @@
       </p:sp>
       <p:sp>
         <p:nvSpPr>
-          <p:cNvPr id="8" name="Rectangle 7"/>
+          <p:cNvPr id="9" name="Rectangle 8"/>
           <p:cNvSpPr/>
           <p:nvPr/>
         </p:nvSpPr>
         <p:spPr>
           <a:xfrm>
-            <a:off x="658368" y="2967228"/>
+            <a:off x="5504688" y="2967228"/>
             <a:ext cx="68580" cy="68580"/>
           </a:xfrm>
           <a:prstGeom prst="rect">
@@ -23260,14 +23374,14 @@
       </p:sp>
       <p:sp>
         <p:nvSpPr>
-          <p:cNvPr id="9" name="TextBox 8"/>
+          <p:cNvPr id="10" name="TextBox 9"/>
           <p:cNvSpPr txBox="1"/>
           <p:nvPr/>
         </p:nvSpPr>
         <p:spPr>
           <a:xfrm>
-            <a:off x="896112" y="2884932"/>
-            <a:ext cx="10637215" cy="1110996"/>
+            <a:off x="5742432" y="2884932"/>
+            <a:ext cx="5790895" cy="1110996"/>
           </a:xfrm>
           <a:prstGeom prst="rect">
             <a:avLst/>
@@ -23289,7 +23403,7 @@
               </a:spcBef>
             </a:pPr>
             <a:r>
-              <a:rPr sz="1750" b="0">
+              <a:rPr sz="1600" b="0">
                 <a:solidFill>
                   <a:srgbClr val="0B0B0B"/>
                 </a:solidFill>
@@ -23302,13 +23416,13 @@
       </p:sp>
       <p:sp>
         <p:nvSpPr>
-          <p:cNvPr id="10" name="Rectangle 9"/>
+          <p:cNvPr id="11" name="Rectangle 10"/>
           <p:cNvSpPr/>
           <p:nvPr/>
         </p:nvSpPr>
         <p:spPr>
           <a:xfrm>
-            <a:off x="658368" y="4055364"/>
+            <a:off x="5504688" y="4055364"/>
             <a:ext cx="68580" cy="68580"/>
           </a:xfrm>
           <a:prstGeom prst="rect">
@@ -23346,14 +23460,14 @@
       </p:sp>
       <p:sp>
         <p:nvSpPr>
-          <p:cNvPr id="11" name="TextBox 10"/>
+          <p:cNvPr id="12" name="TextBox 11"/>
           <p:cNvSpPr txBox="1"/>
           <p:nvPr/>
         </p:nvSpPr>
         <p:spPr>
           <a:xfrm>
-            <a:off x="896112" y="3973068"/>
-            <a:ext cx="10637215" cy="1110996"/>
+            <a:off x="5742432" y="3973068"/>
+            <a:ext cx="5790895" cy="1110996"/>
           </a:xfrm>
           <a:prstGeom prst="rect">
             <a:avLst/>
@@ -23375,7 +23489,7 @@
               </a:spcBef>
             </a:pPr>
             <a:r>
-              <a:rPr sz="1750" b="0">
+              <a:rPr sz="1600" b="0">
                 <a:solidFill>
                   <a:srgbClr val="0B0B0B"/>
                 </a:solidFill>
@@ -23388,13 +23502,13 @@
       </p:sp>
       <p:sp>
         <p:nvSpPr>
-          <p:cNvPr id="12" name="Rectangle 11"/>
+          <p:cNvPr id="13" name="Rectangle 12"/>
           <p:cNvSpPr/>
           <p:nvPr/>
         </p:nvSpPr>
         <p:spPr>
           <a:xfrm>
-            <a:off x="658368" y="5143500"/>
+            <a:off x="5504688" y="5143500"/>
             <a:ext cx="68580" cy="68580"/>
           </a:xfrm>
           <a:prstGeom prst="rect">
@@ -23432,14 +23546,14 @@
       </p:sp>
       <p:sp>
         <p:nvSpPr>
-          <p:cNvPr id="13" name="TextBox 12"/>
+          <p:cNvPr id="14" name="TextBox 13"/>
           <p:cNvSpPr txBox="1"/>
           <p:nvPr/>
         </p:nvSpPr>
         <p:spPr>
           <a:xfrm>
-            <a:off x="896112" y="5061204"/>
-            <a:ext cx="10637215" cy="1110996"/>
+            <a:off x="5742432" y="5061204"/>
+            <a:ext cx="5790895" cy="1110996"/>
           </a:xfrm>
           <a:prstGeom prst="rect">
             <a:avLst/>
@@ -23461,7 +23575,7 @@
               </a:spcBef>
             </a:pPr>
             <a:r>
-              <a:rPr sz="1750" b="0">
+              <a:rPr sz="1600" b="0">
                 <a:solidFill>
                   <a:srgbClr val="0B0B0B"/>
                 </a:solidFill>
@@ -23474,7 +23588,7 @@
       </p:sp>
       <p:sp>
         <p:nvSpPr>
-          <p:cNvPr id="14" name="Rectangle 13"/>
+          <p:cNvPr id="15" name="Rectangle 14"/>
           <p:cNvSpPr/>
           <p:nvPr/>
         </p:nvSpPr>
@@ -23518,7 +23632,7 @@
       </p:sp>
       <p:sp>
         <p:nvSpPr>
-          <p:cNvPr id="15" name="TextBox 14"/>
+          <p:cNvPr id="16" name="TextBox 15"/>
           <p:cNvSpPr txBox="1"/>
           <p:nvPr/>
         </p:nvSpPr>
@@ -23557,7 +23671,7 @@
       </p:sp>
       <p:sp>
         <p:nvSpPr>
-          <p:cNvPr id="16" name="TextBox 15"/>
+          <p:cNvPr id="17" name="TextBox 16"/>
           <p:cNvSpPr txBox="1"/>
           <p:nvPr/>
         </p:nvSpPr>

--- a/docs/support_soutenance.pptx
+++ b/docs/support_soutenance.pptx
@@ -7929,45 +7929,6 @@
         </p:nvSpPr>
         <p:spPr>
           <a:xfrm>
-            <a:off x="786384" y="6254496"/>
-            <a:ext cx="8229600" cy="274320"/>
-          </a:xfrm>
-          <a:prstGeom prst="rect">
-            <a:avLst/>
-          </a:prstGeom>
-          <a:noFill/>
-        </p:spPr>
-        <p:txBody>
-          <a:bodyPr wrap="square" lIns="0" rIns="0" tIns="0" bIns="0">
-            <a:spAutoFit/>
-          </a:bodyPr>
-          <a:lstStyle/>
-          <a:p>
-            <a:pPr algn="l">
-              <a:spcBef>
-                <a:spcPts val="0"/>
-              </a:spcBef>
-            </a:pPr>
-            <a:r>
-              <a:rPr sz="900" b="0">
-                <a:solidFill>
-                  <a:srgbClr val="52514E"/>
-                </a:solidFill>
-                <a:latin typeface="Segoe UI"/>
-              </a:rPr>
-              <a:t>D10   ·   07:40   ·   C4.2.1   ·   criteres 11</a:t>
-            </a:r>
-          </a:p>
-        </p:txBody>
-      </p:sp>
-      <p:sp>
-        <p:nvSpPr>
-          <p:cNvPr id="15" name="TextBox 14"/>
-          <p:cNvSpPr txBox="1"/>
-          <p:nvPr/>
-        </p:nvSpPr>
-        <p:spPr>
-          <a:xfrm>
             <a:off x="10070287" y="6254496"/>
             <a:ext cx="1463040" cy="274320"/>
           </a:xfrm>
@@ -8480,45 +8441,6 @@
         </p:nvSpPr>
         <p:spPr>
           <a:xfrm>
-            <a:off x="786384" y="6254496"/>
-            <a:ext cx="8229600" cy="274320"/>
-          </a:xfrm>
-          <a:prstGeom prst="rect">
-            <a:avLst/>
-          </a:prstGeom>
-          <a:noFill/>
-        </p:spPr>
-        <p:txBody>
-          <a:bodyPr wrap="square" lIns="0" rIns="0" tIns="0" bIns="0">
-            <a:spAutoFit/>
-          </a:bodyPr>
-          <a:lstStyle/>
-          <a:p>
-            <a:pPr algn="l">
-              <a:spcBef>
-                <a:spcPts val="0"/>
-              </a:spcBef>
-            </a:pPr>
-            <a:r>
-              <a:rPr sz="900" b="0">
-                <a:solidFill>
-                  <a:srgbClr val="52514E"/>
-                </a:solidFill>
-                <a:latin typeface="Segoe UI"/>
-              </a:rPr>
-              <a:t>D10r   ·   07:40   ·   C4.2.1   ·   criteres 11</a:t>
-            </a:r>
-          </a:p>
-        </p:txBody>
-      </p:sp>
-      <p:sp>
-        <p:nvSpPr>
-          <p:cNvPr id="10" name="TextBox 9"/>
-          <p:cNvSpPr txBox="1"/>
-          <p:nvPr/>
-        </p:nvSpPr>
-        <p:spPr>
-          <a:xfrm>
             <a:off x="10070287" y="6254496"/>
             <a:ext cx="1463040" cy="274320"/>
           </a:xfrm>
@@ -9601,45 +9523,6 @@
         </p:nvSpPr>
         <p:spPr>
           <a:xfrm>
-            <a:off x="786384" y="6254496"/>
-            <a:ext cx="8229600" cy="274320"/>
-          </a:xfrm>
-          <a:prstGeom prst="rect">
-            <a:avLst/>
-          </a:prstGeom>
-          <a:noFill/>
-        </p:spPr>
-        <p:txBody>
-          <a:bodyPr wrap="square" lIns="0" rIns="0" tIns="0" bIns="0">
-            <a:spAutoFit/>
-          </a:bodyPr>
-          <a:lstStyle/>
-          <a:p>
-            <a:pPr algn="l">
-              <a:spcBef>
-                <a:spcPts val="0"/>
-              </a:spcBef>
-            </a:pPr>
-            <a:r>
-              <a:rPr sz="900" b="0">
-                <a:solidFill>
-                  <a:srgbClr val="52514E"/>
-                </a:solidFill>
-                <a:latin typeface="Segoe UI"/>
-              </a:rPr>
-              <a:t>D11   ·   08:30   ·   C4.2.1   ·   criteres 10, 12</a:t>
-            </a:r>
-          </a:p>
-        </p:txBody>
-      </p:sp>
-      <p:sp>
-        <p:nvSpPr>
-          <p:cNvPr id="27" name="TextBox 26"/>
-          <p:cNvSpPr txBox="1"/>
-          <p:nvPr/>
-        </p:nvSpPr>
-        <p:spPr>
-          <a:xfrm>
             <a:off x="10070287" y="6254496"/>
             <a:ext cx="1463040" cy="274320"/>
           </a:xfrm>
@@ -10165,45 +10048,6 @@
         </p:nvSpPr>
         <p:spPr>
           <a:xfrm>
-            <a:off x="786384" y="6254496"/>
-            <a:ext cx="8229600" cy="274320"/>
-          </a:xfrm>
-          <a:prstGeom prst="rect">
-            <a:avLst/>
-          </a:prstGeom>
-          <a:noFill/>
-        </p:spPr>
-        <p:txBody>
-          <a:bodyPr wrap="square" lIns="0" rIns="0" tIns="0" bIns="0">
-            <a:spAutoFit/>
-          </a:bodyPr>
-          <a:lstStyle/>
-          <a:p>
-            <a:pPr algn="l">
-              <a:spcBef>
-                <a:spcPts val="0"/>
-              </a:spcBef>
-            </a:pPr>
-            <a:r>
-              <a:rPr sz="900" b="0">
-                <a:solidFill>
-                  <a:srgbClr val="52514E"/>
-                </a:solidFill>
-                <a:latin typeface="Segoe UI"/>
-              </a:rPr>
-              <a:t>D12   ·   09:30   ·   C4.2.2   ·   criteres 13, 14, 15</a:t>
-            </a:r>
-          </a:p>
-        </p:txBody>
-      </p:sp>
-      <p:sp>
-        <p:nvSpPr>
-          <p:cNvPr id="14" name="TextBox 13"/>
-          <p:cNvSpPr txBox="1"/>
-          <p:nvPr/>
-        </p:nvSpPr>
-        <p:spPr>
-          <a:xfrm>
             <a:off x="10070287" y="6254496"/>
             <a:ext cx="1463040" cy="274320"/>
           </a:xfrm>
@@ -10862,45 +10706,6 @@
         </p:nvSpPr>
         <p:spPr>
           <a:xfrm>
-            <a:off x="786384" y="6254496"/>
-            <a:ext cx="8229600" cy="274320"/>
-          </a:xfrm>
-          <a:prstGeom prst="rect">
-            <a:avLst/>
-          </a:prstGeom>
-          <a:noFill/>
-        </p:spPr>
-        <p:txBody>
-          <a:bodyPr wrap="square" lIns="0" rIns="0" tIns="0" bIns="0">
-            <a:spAutoFit/>
-          </a:bodyPr>
-          <a:lstStyle/>
-          <a:p>
-            <a:pPr algn="l">
-              <a:spcBef>
-                <a:spcPts val="0"/>
-              </a:spcBef>
-            </a:pPr>
-            <a:r>
-              <a:rPr sz="900" b="0">
-                <a:solidFill>
-                  <a:srgbClr val="52514E"/>
-                </a:solidFill>
-                <a:latin typeface="Segoe UI"/>
-              </a:rPr>
-              <a:t>D13   ·   10:00   ·   C4.2.2   ·   criteres 13</a:t>
-            </a:r>
-          </a:p>
-        </p:txBody>
-      </p:sp>
-      <p:sp>
-        <p:nvSpPr>
-          <p:cNvPr id="17" name="TextBox 16"/>
-          <p:cNvSpPr txBox="1"/>
-          <p:nvPr/>
-        </p:nvSpPr>
-        <p:spPr>
-          <a:xfrm>
             <a:off x="10070287" y="6254496"/>
             <a:ext cx="1463040" cy="274320"/>
           </a:xfrm>
@@ -11606,45 +11411,6 @@
         </p:nvSpPr>
         <p:spPr>
           <a:xfrm>
-            <a:off x="786384" y="6254496"/>
-            <a:ext cx="8229600" cy="274320"/>
-          </a:xfrm>
-          <a:prstGeom prst="rect">
-            <a:avLst/>
-          </a:prstGeom>
-          <a:noFill/>
-        </p:spPr>
-        <p:txBody>
-          <a:bodyPr wrap="square" lIns="0" rIns="0" tIns="0" bIns="0">
-            <a:spAutoFit/>
-          </a:bodyPr>
-          <a:lstStyle/>
-          <a:p>
-            <a:pPr algn="l">
-              <a:spcBef>
-                <a:spcPts val="0"/>
-              </a:spcBef>
-            </a:pPr>
-            <a:r>
-              <a:rPr sz="900" b="0">
-                <a:solidFill>
-                  <a:srgbClr val="52514E"/>
-                </a:solidFill>
-                <a:latin typeface="Segoe UI"/>
-              </a:rPr>
-              <a:t>D14   ·   11:20   ·   C4.2.2   ·   criteres 14</a:t>
-            </a:r>
-          </a:p>
-        </p:txBody>
-      </p:sp>
-      <p:sp>
-        <p:nvSpPr>
-          <p:cNvPr id="17" name="TextBox 16"/>
-          <p:cNvSpPr txBox="1"/>
-          <p:nvPr/>
-        </p:nvSpPr>
-        <p:spPr>
-          <a:xfrm>
             <a:off x="10070287" y="6254496"/>
             <a:ext cx="1463040" cy="274320"/>
           </a:xfrm>
@@ -12221,45 +11987,6 @@
         </p:nvSpPr>
         <p:spPr>
           <a:xfrm>
-            <a:off x="786384" y="6254496"/>
-            <a:ext cx="8229600" cy="274320"/>
-          </a:xfrm>
-          <a:prstGeom prst="rect">
-            <a:avLst/>
-          </a:prstGeom>
-          <a:noFill/>
-        </p:spPr>
-        <p:txBody>
-          <a:bodyPr wrap="square" lIns="0" rIns="0" tIns="0" bIns="0">
-            <a:spAutoFit/>
-          </a:bodyPr>
-          <a:lstStyle/>
-          <a:p>
-            <a:pPr algn="l">
-              <a:spcBef>
-                <a:spcPts val="0"/>
-              </a:spcBef>
-            </a:pPr>
-            <a:r>
-              <a:rPr sz="900" b="0">
-                <a:solidFill>
-                  <a:srgbClr val="52514E"/>
-                </a:solidFill>
-                <a:latin typeface="Segoe UI"/>
-              </a:rPr>
-              <a:t>D14r   ·   11:20   ·   C4.2.2   ·   criteres 14</a:t>
-            </a:r>
-          </a:p>
-        </p:txBody>
-      </p:sp>
-      <p:sp>
-        <p:nvSpPr>
-          <p:cNvPr id="10" name="TextBox 9"/>
-          <p:cNvSpPr txBox="1"/>
-          <p:nvPr/>
-        </p:nvSpPr>
-        <p:spPr>
-          <a:xfrm>
             <a:off x="10070287" y="6254496"/>
             <a:ext cx="1463040" cy="274320"/>
           </a:xfrm>
@@ -12918,45 +12645,6 @@
         </p:nvSpPr>
         <p:spPr>
           <a:xfrm>
-            <a:off x="786384" y="6254496"/>
-            <a:ext cx="8229600" cy="274320"/>
-          </a:xfrm>
-          <a:prstGeom prst="rect">
-            <a:avLst/>
-          </a:prstGeom>
-          <a:noFill/>
-        </p:spPr>
-        <p:txBody>
-          <a:bodyPr wrap="square" lIns="0" rIns="0" tIns="0" bIns="0">
-            <a:spAutoFit/>
-          </a:bodyPr>
-          <a:lstStyle/>
-          <a:p>
-            <a:pPr algn="l">
-              <a:spcBef>
-                <a:spcPts val="0"/>
-              </a:spcBef>
-            </a:pPr>
-            <a:r>
-              <a:rPr sz="900" b="0">
-                <a:solidFill>
-                  <a:srgbClr val="52514E"/>
-                </a:solidFill>
-                <a:latin typeface="Segoe UI"/>
-              </a:rPr>
-              <a:t>D15   ·   12:40   ·   C4.2.2   ·   criteres 15</a:t>
-            </a:r>
-          </a:p>
-        </p:txBody>
-      </p:sp>
-      <p:sp>
-        <p:nvSpPr>
-          <p:cNvPr id="17" name="TextBox 16"/>
-          <p:cNvSpPr txBox="1"/>
-          <p:nvPr/>
-        </p:nvSpPr>
-        <p:spPr>
-          <a:xfrm>
             <a:off x="10070287" y="6254496"/>
             <a:ext cx="1463040" cy="274320"/>
           </a:xfrm>
@@ -13533,45 +13221,6 @@
         </p:nvSpPr>
         <p:spPr>
           <a:xfrm>
-            <a:off x="786384" y="6254496"/>
-            <a:ext cx="8229600" cy="274320"/>
-          </a:xfrm>
-          <a:prstGeom prst="rect">
-            <a:avLst/>
-          </a:prstGeom>
-          <a:noFill/>
-        </p:spPr>
-        <p:txBody>
-          <a:bodyPr wrap="square" lIns="0" rIns="0" tIns="0" bIns="0">
-            <a:spAutoFit/>
-          </a:bodyPr>
-          <a:lstStyle/>
-          <a:p>
-            <a:pPr algn="l">
-              <a:spcBef>
-                <a:spcPts val="0"/>
-              </a:spcBef>
-            </a:pPr>
-            <a:r>
-              <a:rPr sz="900" b="0">
-                <a:solidFill>
-                  <a:srgbClr val="52514E"/>
-                </a:solidFill>
-                <a:latin typeface="Segoe UI"/>
-              </a:rPr>
-              <a:t>D16   ·   13:40   ·   C4.2.2   ·   criteres 15</a:t>
-            </a:r>
-          </a:p>
-        </p:txBody>
-      </p:sp>
-      <p:sp>
-        <p:nvSpPr>
-          <p:cNvPr id="10" name="TextBox 9"/>
-          <p:cNvSpPr txBox="1"/>
-          <p:nvPr/>
-        </p:nvSpPr>
-        <p:spPr>
-          <a:xfrm>
             <a:off x="10070287" y="6254496"/>
             <a:ext cx="1463040" cy="274320"/>
           </a:xfrm>
@@ -13902,45 +13551,6 @@
         </p:nvSpPr>
         <p:spPr>
           <a:xfrm>
-            <a:off x="786384" y="6254496"/>
-            <a:ext cx="8229600" cy="274320"/>
-          </a:xfrm>
-          <a:prstGeom prst="rect">
-            <a:avLst/>
-          </a:prstGeom>
-          <a:noFill/>
-        </p:spPr>
-        <p:txBody>
-          <a:bodyPr wrap="square" lIns="0" rIns="0" tIns="0" bIns="0">
-            <a:spAutoFit/>
-          </a:bodyPr>
-          <a:lstStyle/>
-          <a:p>
-            <a:pPr algn="l">
-              <a:spcBef>
-                <a:spcPts val="0"/>
-              </a:spcBef>
-            </a:pPr>
-            <a:r>
-              <a:rPr sz="900" b="0">
-                <a:solidFill>
-                  <a:srgbClr val="52514E"/>
-                </a:solidFill>
-                <a:latin typeface="Segoe UI"/>
-              </a:rPr>
-              <a:t>D17   ·   15:00   ·   C4.2.3   ·   criteres 16</a:t>
-            </a:r>
-          </a:p>
-        </p:txBody>
-      </p:sp>
-      <p:sp>
-        <p:nvSpPr>
-          <p:cNvPr id="10" name="TextBox 9"/>
-          <p:cNvSpPr txBox="1"/>
-          <p:nvPr/>
-        </p:nvSpPr>
-        <p:spPr>
-          <a:xfrm>
             <a:off x="10070287" y="6254496"/>
             <a:ext cx="1463040" cy="274320"/>
           </a:xfrm>
@@ -15068,45 +14678,6 @@
         </p:nvSpPr>
         <p:spPr>
           <a:xfrm>
-            <a:off x="786384" y="6254496"/>
-            <a:ext cx="8229600" cy="274320"/>
-          </a:xfrm>
-          <a:prstGeom prst="rect">
-            <a:avLst/>
-          </a:prstGeom>
-          <a:noFill/>
-        </p:spPr>
-        <p:txBody>
-          <a:bodyPr wrap="square" lIns="0" rIns="0" tIns="0" bIns="0">
-            <a:spAutoFit/>
-          </a:bodyPr>
-          <a:lstStyle/>
-          <a:p>
-            <a:pPr algn="l">
-              <a:spcBef>
-                <a:spcPts val="0"/>
-              </a:spcBef>
-            </a:pPr>
-            <a:r>
-              <a:rPr sz="900" b="0">
-                <a:solidFill>
-                  <a:srgbClr val="52514E"/>
-                </a:solidFill>
-                <a:latin typeface="Segoe UI"/>
-              </a:rPr>
-              <a:t>D02   ·   00:20</a:t>
-            </a:r>
-          </a:p>
-        </p:txBody>
-      </p:sp>
-      <p:sp>
-        <p:nvSpPr>
-          <p:cNvPr id="28" name="TextBox 27"/>
-          <p:cNvSpPr txBox="1"/>
-          <p:nvPr/>
-        </p:nvSpPr>
-        <p:spPr>
-          <a:xfrm>
             <a:off x="10070287" y="6254496"/>
             <a:ext cx="1463040" cy="274320"/>
           </a:xfrm>
@@ -15491,45 +15062,6 @@
         </p:nvSpPr>
         <p:spPr>
           <a:xfrm>
-            <a:off x="786384" y="6254496"/>
-            <a:ext cx="8229600" cy="274320"/>
-          </a:xfrm>
-          <a:prstGeom prst="rect">
-            <a:avLst/>
-          </a:prstGeom>
-          <a:noFill/>
-        </p:spPr>
-        <p:txBody>
-          <a:bodyPr wrap="square" lIns="0" rIns="0" tIns="0" bIns="0">
-            <a:spAutoFit/>
-          </a:bodyPr>
-          <a:lstStyle/>
-          <a:p>
-            <a:pPr algn="l">
-              <a:spcBef>
-                <a:spcPts val="0"/>
-              </a:spcBef>
-            </a:pPr>
-            <a:r>
-              <a:rPr sz="900" b="0">
-                <a:solidFill>
-                  <a:srgbClr val="52514E"/>
-                </a:solidFill>
-                <a:latin typeface="Segoe UI"/>
-              </a:rPr>
-              <a:t>D18   ·   16:20   ·   C4.2.3   ·   criteres 16</a:t>
-            </a:r>
-          </a:p>
-        </p:txBody>
-      </p:sp>
-      <p:sp>
-        <p:nvSpPr>
-          <p:cNvPr id="10" name="TextBox 9"/>
-          <p:cNvSpPr txBox="1"/>
-          <p:nvPr/>
-        </p:nvSpPr>
-        <p:spPr>
-          <a:xfrm>
             <a:off x="10070287" y="6254496"/>
             <a:ext cx="1463040" cy="274320"/>
           </a:xfrm>
@@ -16227,45 +15759,6 @@
         </p:nvSpPr>
         <p:spPr>
           <a:xfrm>
-            <a:off x="786384" y="6254496"/>
-            <a:ext cx="8229600" cy="274320"/>
-          </a:xfrm>
-          <a:prstGeom prst="rect">
-            <a:avLst/>
-          </a:prstGeom>
-          <a:noFill/>
-        </p:spPr>
-        <p:txBody>
-          <a:bodyPr wrap="square" lIns="0" rIns="0" tIns="0" bIns="0">
-            <a:spAutoFit/>
-          </a:bodyPr>
-          <a:lstStyle/>
-          <a:p>
-            <a:pPr algn="l">
-              <a:spcBef>
-                <a:spcPts val="0"/>
-              </a:spcBef>
-            </a:pPr>
-            <a:r>
-              <a:rPr sz="900" b="0">
-                <a:solidFill>
-                  <a:srgbClr val="52514E"/>
-                </a:solidFill>
-                <a:latin typeface="Segoe UI"/>
-              </a:rPr>
-              <a:t>D19   ·   17:30   ·   C4.3.1   ·   criteres 17, 18</a:t>
-            </a:r>
-          </a:p>
-        </p:txBody>
-      </p:sp>
-      <p:sp>
-        <p:nvSpPr>
-          <p:cNvPr id="18" name="TextBox 17"/>
-          <p:cNvSpPr txBox="1"/>
-          <p:nvPr/>
-        </p:nvSpPr>
-        <p:spPr>
-          <a:xfrm>
             <a:off x="10070287" y="6254496"/>
             <a:ext cx="1463040" cy="274320"/>
           </a:xfrm>
@@ -16799,45 +16292,6 @@
         </p:nvSpPr>
         <p:spPr>
           <a:xfrm>
-            <a:off x="786384" y="6254496"/>
-            <a:ext cx="8229600" cy="274320"/>
-          </a:xfrm>
-          <a:prstGeom prst="rect">
-            <a:avLst/>
-          </a:prstGeom>
-          <a:noFill/>
-        </p:spPr>
-        <p:txBody>
-          <a:bodyPr wrap="square" lIns="0" rIns="0" tIns="0" bIns="0">
-            <a:spAutoFit/>
-          </a:bodyPr>
-          <a:lstStyle/>
-          <a:p>
-            <a:pPr algn="l">
-              <a:spcBef>
-                <a:spcPts val="0"/>
-              </a:spcBef>
-            </a:pPr>
-            <a:r>
-              <a:rPr sz="900" b="0">
-                <a:solidFill>
-                  <a:srgbClr val="52514E"/>
-                </a:solidFill>
-                <a:latin typeface="Segoe UI"/>
-              </a:rPr>
-              <a:t>D20   ·   18:30   ·   C4.3.1   ·   criteres 19</a:t>
-            </a:r>
-          </a:p>
-        </p:txBody>
-      </p:sp>
-      <p:sp>
-        <p:nvSpPr>
-          <p:cNvPr id="13" name="TextBox 12"/>
-          <p:cNvSpPr txBox="1"/>
-          <p:nvPr/>
-        </p:nvSpPr>
-        <p:spPr>
-          <a:xfrm>
             <a:off x="10070287" y="6254496"/>
             <a:ext cx="1463040" cy="274320"/>
           </a:xfrm>
@@ -17414,45 +16868,6 @@
         </p:nvSpPr>
         <p:spPr>
           <a:xfrm>
-            <a:off x="786384" y="6254496"/>
-            <a:ext cx="8229600" cy="274320"/>
-          </a:xfrm>
-          <a:prstGeom prst="rect">
-            <a:avLst/>
-          </a:prstGeom>
-          <a:noFill/>
-        </p:spPr>
-        <p:txBody>
-          <a:bodyPr wrap="square" lIns="0" rIns="0" tIns="0" bIns="0">
-            <a:spAutoFit/>
-          </a:bodyPr>
-          <a:lstStyle/>
-          <a:p>
-            <a:pPr algn="l">
-              <a:spcBef>
-                <a:spcPts val="0"/>
-              </a:spcBef>
-            </a:pPr>
-            <a:r>
-              <a:rPr sz="900" b="0">
-                <a:solidFill>
-                  <a:srgbClr val="52514E"/>
-                </a:solidFill>
-                <a:latin typeface="Segoe UI"/>
-              </a:rPr>
-              <a:t>D20r   ·   18:30   ·   C4.3.1   ·   criteres 19</a:t>
-            </a:r>
-          </a:p>
-        </p:txBody>
-      </p:sp>
-      <p:sp>
-        <p:nvSpPr>
-          <p:cNvPr id="10" name="TextBox 9"/>
-          <p:cNvSpPr txBox="1"/>
-          <p:nvPr/>
-        </p:nvSpPr>
-        <p:spPr>
-          <a:xfrm>
             <a:off x="10070287" y="6254496"/>
             <a:ext cx="1463040" cy="274320"/>
           </a:xfrm>
@@ -18111,45 +17526,6 @@
         </p:nvSpPr>
         <p:spPr>
           <a:xfrm>
-            <a:off x="786384" y="6254496"/>
-            <a:ext cx="8229600" cy="274320"/>
-          </a:xfrm>
-          <a:prstGeom prst="rect">
-            <a:avLst/>
-          </a:prstGeom>
-          <a:noFill/>
-        </p:spPr>
-        <p:txBody>
-          <a:bodyPr wrap="square" lIns="0" rIns="0" tIns="0" bIns="0">
-            <a:spAutoFit/>
-          </a:bodyPr>
-          <a:lstStyle/>
-          <a:p>
-            <a:pPr algn="l">
-              <a:spcBef>
-                <a:spcPts val="0"/>
-              </a:spcBef>
-            </a:pPr>
-            <a:r>
-              <a:rPr sz="900" b="0">
-                <a:solidFill>
-                  <a:srgbClr val="52514E"/>
-                </a:solidFill>
-                <a:latin typeface="Segoe UI"/>
-              </a:rPr>
-              <a:t>D21   ·   19:30   ·   C4.3.1   ·   criteres 20</a:t>
-            </a:r>
-          </a:p>
-        </p:txBody>
-      </p:sp>
-      <p:sp>
-        <p:nvSpPr>
-          <p:cNvPr id="17" name="TextBox 16"/>
-          <p:cNvSpPr txBox="1"/>
-          <p:nvPr/>
-        </p:nvSpPr>
-        <p:spPr>
-          <a:xfrm>
             <a:off x="10070287" y="6254496"/>
             <a:ext cx="1463040" cy="274320"/>
           </a:xfrm>
@@ -18761,45 +18137,6 @@
         </p:nvSpPr>
         <p:spPr>
           <a:xfrm>
-            <a:off x="786384" y="6254496"/>
-            <a:ext cx="8229600" cy="274320"/>
-          </a:xfrm>
-          <a:prstGeom prst="rect">
-            <a:avLst/>
-          </a:prstGeom>
-          <a:noFill/>
-        </p:spPr>
-        <p:txBody>
-          <a:bodyPr wrap="square" lIns="0" rIns="0" tIns="0" bIns="0">
-            <a:spAutoFit/>
-          </a:bodyPr>
-          <a:lstStyle/>
-          <a:p>
-            <a:pPr algn="l">
-              <a:spcBef>
-                <a:spcPts val="0"/>
-              </a:spcBef>
-            </a:pPr>
-            <a:r>
-              <a:rPr sz="900" b="0">
-                <a:solidFill>
-                  <a:srgbClr val="52514E"/>
-                </a:solidFill>
-                <a:latin typeface="Segoe UI"/>
-              </a:rPr>
-              <a:t>D22   ·   20:30   ·   C4.3.2   ·   criteres 21, 22, 23</a:t>
-            </a:r>
-          </a:p>
-        </p:txBody>
-      </p:sp>
-      <p:sp>
-        <p:nvSpPr>
-          <p:cNvPr id="16" name="TextBox 15"/>
-          <p:cNvSpPr txBox="1"/>
-          <p:nvPr/>
-        </p:nvSpPr>
-        <p:spPr>
-          <a:xfrm>
             <a:off x="10070287" y="6254496"/>
             <a:ext cx="1463040" cy="274320"/>
           </a:xfrm>
@@ -19599,45 +18936,6 @@
         </p:nvSpPr>
         <p:spPr>
           <a:xfrm>
-            <a:off x="786384" y="6254496"/>
-            <a:ext cx="8229600" cy="274320"/>
-          </a:xfrm>
-          <a:prstGeom prst="rect">
-            <a:avLst/>
-          </a:prstGeom>
-          <a:noFill/>
-        </p:spPr>
-        <p:txBody>
-          <a:bodyPr wrap="square" lIns="0" rIns="0" tIns="0" bIns="0">
-            <a:spAutoFit/>
-          </a:bodyPr>
-          <a:lstStyle/>
-          <a:p>
-            <a:pPr algn="l">
-              <a:spcBef>
-                <a:spcPts val="0"/>
-              </a:spcBef>
-            </a:pPr>
-            <a:r>
-              <a:rPr sz="900" b="0">
-                <a:solidFill>
-                  <a:srgbClr val="52514E"/>
-                </a:solidFill>
-                <a:latin typeface="Segoe UI"/>
-              </a:rPr>
-              <a:t>D23   ·   21:30   ·   C4.3.2   ·   criteres 24</a:t>
-            </a:r>
-          </a:p>
-        </p:txBody>
-      </p:sp>
-      <p:sp>
-        <p:nvSpPr>
-          <p:cNvPr id="20" name="TextBox 19"/>
-          <p:cNvSpPr txBox="1"/>
-          <p:nvPr/>
-        </p:nvSpPr>
-        <p:spPr>
-          <a:xfrm>
             <a:off x="10070287" y="6254496"/>
             <a:ext cx="1463040" cy="274320"/>
           </a:xfrm>
@@ -20249,45 +19547,6 @@
         </p:nvSpPr>
         <p:spPr>
           <a:xfrm>
-            <a:off x="786384" y="6254496"/>
-            <a:ext cx="8229600" cy="274320"/>
-          </a:xfrm>
-          <a:prstGeom prst="rect">
-            <a:avLst/>
-          </a:prstGeom>
-          <a:noFill/>
-        </p:spPr>
-        <p:txBody>
-          <a:bodyPr wrap="square" lIns="0" rIns="0" tIns="0" bIns="0">
-            <a:spAutoFit/>
-          </a:bodyPr>
-          <a:lstStyle/>
-          <a:p>
-            <a:pPr algn="l">
-              <a:spcBef>
-                <a:spcPts val="0"/>
-              </a:spcBef>
-            </a:pPr>
-            <a:r>
-              <a:rPr sz="900" b="0">
-                <a:solidFill>
-                  <a:srgbClr val="52514E"/>
-                </a:solidFill>
-                <a:latin typeface="Segoe UI"/>
-              </a:rPr>
-              <a:t>D24   ·   22:30   ·   C4.3.3   ·   criteres 25</a:t>
-            </a:r>
-          </a:p>
-        </p:txBody>
-      </p:sp>
-      <p:sp>
-        <p:nvSpPr>
-          <p:cNvPr id="16" name="TextBox 15"/>
-          <p:cNvSpPr txBox="1"/>
-          <p:nvPr/>
-        </p:nvSpPr>
-        <p:spPr>
-          <a:xfrm>
             <a:off x="10070287" y="6254496"/>
             <a:ext cx="1463040" cy="274320"/>
           </a:xfrm>
@@ -20618,45 +19877,6 @@
         </p:nvSpPr>
         <p:spPr>
           <a:xfrm>
-            <a:off x="786384" y="6254496"/>
-            <a:ext cx="8229600" cy="274320"/>
-          </a:xfrm>
-          <a:prstGeom prst="rect">
-            <a:avLst/>
-          </a:prstGeom>
-          <a:noFill/>
-        </p:spPr>
-        <p:txBody>
-          <a:bodyPr wrap="square" lIns="0" rIns="0" tIns="0" bIns="0">
-            <a:spAutoFit/>
-          </a:bodyPr>
-          <a:lstStyle/>
-          <a:p>
-            <a:pPr algn="l">
-              <a:spcBef>
-                <a:spcPts val="0"/>
-              </a:spcBef>
-            </a:pPr>
-            <a:r>
-              <a:rPr sz="900" b="0">
-                <a:solidFill>
-                  <a:srgbClr val="52514E"/>
-                </a:solidFill>
-                <a:latin typeface="Segoe UI"/>
-              </a:rPr>
-              <a:t>D25   ·   23:30   ·   C4.4.1   ·   criteres 26, 27</a:t>
-            </a:r>
-          </a:p>
-        </p:txBody>
-      </p:sp>
-      <p:sp>
-        <p:nvSpPr>
-          <p:cNvPr id="10" name="TextBox 9"/>
-          <p:cNvSpPr txBox="1"/>
-          <p:nvPr/>
-        </p:nvSpPr>
-        <p:spPr>
-          <a:xfrm>
             <a:off x="10070287" y="6254496"/>
             <a:ext cx="1463040" cy="274320"/>
           </a:xfrm>
@@ -21229,45 +20449,6 @@
         </p:nvSpPr>
         <p:spPr>
           <a:xfrm>
-            <a:off x="786384" y="6254496"/>
-            <a:ext cx="8229600" cy="274320"/>
-          </a:xfrm>
-          <a:prstGeom prst="rect">
-            <a:avLst/>
-          </a:prstGeom>
-          <a:noFill/>
-        </p:spPr>
-        <p:txBody>
-          <a:bodyPr wrap="square" lIns="0" rIns="0" tIns="0" bIns="0">
-            <a:spAutoFit/>
-          </a:bodyPr>
-          <a:lstStyle/>
-          <a:p>
-            <a:pPr algn="l">
-              <a:spcBef>
-                <a:spcPts val="0"/>
-              </a:spcBef>
-            </a:pPr>
-            <a:r>
-              <a:rPr sz="900" b="0">
-                <a:solidFill>
-                  <a:srgbClr val="52514E"/>
-                </a:solidFill>
-                <a:latin typeface="Segoe UI"/>
-              </a:rPr>
-              <a:t>D26   ·   24:15   ·   C4.4.1   ·   criteres 27</a:t>
-            </a:r>
-          </a:p>
-        </p:txBody>
-      </p:sp>
-      <p:sp>
-        <p:nvSpPr>
-          <p:cNvPr id="15" name="TextBox 14"/>
-          <p:cNvSpPr txBox="1"/>
-          <p:nvPr/>
-        </p:nvSpPr>
-        <p:spPr>
-          <a:xfrm>
             <a:off x="10070287" y="6254496"/>
             <a:ext cx="1463040" cy="274320"/>
           </a:xfrm>
@@ -21965,45 +21146,6 @@
         </p:nvSpPr>
         <p:spPr>
           <a:xfrm>
-            <a:off x="786384" y="6254496"/>
-            <a:ext cx="8229600" cy="274320"/>
-          </a:xfrm>
-          <a:prstGeom prst="rect">
-            <a:avLst/>
-          </a:prstGeom>
-          <a:noFill/>
-        </p:spPr>
-        <p:txBody>
-          <a:bodyPr wrap="square" lIns="0" rIns="0" tIns="0" bIns="0">
-            <a:spAutoFit/>
-          </a:bodyPr>
-          <a:lstStyle/>
-          <a:p>
-            <a:pPr algn="l">
-              <a:spcBef>
-                <a:spcPts val="0"/>
-              </a:spcBef>
-            </a:pPr>
-            <a:r>
-              <a:rPr sz="900" b="0">
-                <a:solidFill>
-                  <a:srgbClr val="52514E"/>
-                </a:solidFill>
-                <a:latin typeface="Segoe UI"/>
-              </a:rPr>
-              <a:t>D03   ·   01:00   ·   C4.1.1   ·   criteres 1, 2</a:t>
-            </a:r>
-          </a:p>
-        </p:txBody>
-      </p:sp>
-      <p:sp>
-        <p:nvSpPr>
-          <p:cNvPr id="18" name="TextBox 17"/>
-          <p:cNvSpPr txBox="1"/>
-          <p:nvPr/>
-        </p:nvSpPr>
-        <p:spPr>
-          <a:xfrm>
             <a:off x="10070287" y="6254496"/>
             <a:ext cx="1463040" cy="274320"/>
           </a:xfrm>
@@ -22603,45 +21745,6 @@
         </p:nvSpPr>
         <p:spPr>
           <a:xfrm>
-            <a:off x="786384" y="6254496"/>
-            <a:ext cx="8229600" cy="274320"/>
-          </a:xfrm>
-          <a:prstGeom prst="rect">
-            <a:avLst/>
-          </a:prstGeom>
-          <a:noFill/>
-        </p:spPr>
-        <p:txBody>
-          <a:bodyPr wrap="square" lIns="0" rIns="0" tIns="0" bIns="0">
-            <a:spAutoFit/>
-          </a:bodyPr>
-          <a:lstStyle/>
-          <a:p>
-            <a:pPr algn="l">
-              <a:spcBef>
-                <a:spcPts val="0"/>
-              </a:spcBef>
-            </a:pPr>
-            <a:r>
-              <a:rPr sz="900" b="0">
-                <a:solidFill>
-                  <a:srgbClr val="52514E"/>
-                </a:solidFill>
-                <a:latin typeface="Segoe UI"/>
-              </a:rPr>
-              <a:t>D27   ·   25:00   ·   C4.4.2   ·   criteres 28</a:t>
-            </a:r>
-          </a:p>
-        </p:txBody>
-      </p:sp>
-      <p:sp>
-        <p:nvSpPr>
-          <p:cNvPr id="11" name="TextBox 10"/>
-          <p:cNvSpPr txBox="1"/>
-          <p:nvPr/>
-        </p:nvSpPr>
-        <p:spPr>
-          <a:xfrm>
             <a:off x="10070287" y="6254496"/>
             <a:ext cx="1463040" cy="274320"/>
           </a:xfrm>
@@ -22933,45 +22036,6 @@
         </p:nvSpPr>
         <p:spPr>
           <a:xfrm>
-            <a:off x="786384" y="6254496"/>
-            <a:ext cx="8229600" cy="274320"/>
-          </a:xfrm>
-          <a:prstGeom prst="rect">
-            <a:avLst/>
-          </a:prstGeom>
-          <a:noFill/>
-        </p:spPr>
-        <p:txBody>
-          <a:bodyPr wrap="square" lIns="0" rIns="0" tIns="0" bIns="0">
-            <a:spAutoFit/>
-          </a:bodyPr>
-          <a:lstStyle/>
-          <a:p>
-            <a:pPr algn="l">
-              <a:spcBef>
-                <a:spcPts val="0"/>
-              </a:spcBef>
-            </a:pPr>
-            <a:r>
-              <a:rPr sz="900" b="0">
-                <a:solidFill>
-                  <a:srgbClr val="52514E"/>
-                </a:solidFill>
-                <a:latin typeface="Segoe UI"/>
-              </a:rPr>
-              <a:t>D28   ·   26:00   ·   C4.4.2   ·   criteres 29, 30, 31</a:t>
-            </a:r>
-          </a:p>
-        </p:txBody>
-      </p:sp>
-      <p:sp>
-        <p:nvSpPr>
-          <p:cNvPr id="9" name="TextBox 8"/>
-          <p:cNvSpPr txBox="1"/>
-          <p:nvPr/>
-        </p:nvSpPr>
-        <p:spPr>
-          <a:xfrm>
             <a:off x="10070287" y="6254496"/>
             <a:ext cx="1463040" cy="274320"/>
           </a:xfrm>
@@ -23638,45 +22702,6 @@
         </p:nvSpPr>
         <p:spPr>
           <a:xfrm>
-            <a:off x="786384" y="6254496"/>
-            <a:ext cx="8229600" cy="274320"/>
-          </a:xfrm>
-          <a:prstGeom prst="rect">
-            <a:avLst/>
-          </a:prstGeom>
-          <a:noFill/>
-        </p:spPr>
-        <p:txBody>
-          <a:bodyPr wrap="square" lIns="0" rIns="0" tIns="0" bIns="0">
-            <a:spAutoFit/>
-          </a:bodyPr>
-          <a:lstStyle/>
-          <a:p>
-            <a:pPr algn="l">
-              <a:spcBef>
-                <a:spcPts val="0"/>
-              </a:spcBef>
-            </a:pPr>
-            <a:r>
-              <a:rPr sz="900" b="0">
-                <a:solidFill>
-                  <a:srgbClr val="52514E"/>
-                </a:solidFill>
-                <a:latin typeface="Segoe UI"/>
-              </a:rPr>
-              <a:t>D29   ·   27:00</a:t>
-            </a:r>
-          </a:p>
-        </p:txBody>
-      </p:sp>
-      <p:sp>
-        <p:nvSpPr>
-          <p:cNvPr id="17" name="TextBox 16"/>
-          <p:cNvSpPr txBox="1"/>
-          <p:nvPr/>
-        </p:nvSpPr>
-        <p:spPr>
-          <a:xfrm>
             <a:off x="10070287" y="6254496"/>
             <a:ext cx="1463040" cy="274320"/>
           </a:xfrm>
@@ -25019,45 +24044,6 @@
         </p:nvSpPr>
         <p:spPr>
           <a:xfrm>
-            <a:off x="786384" y="6254496"/>
-            <a:ext cx="8229600" cy="274320"/>
-          </a:xfrm>
-          <a:prstGeom prst="rect">
-            <a:avLst/>
-          </a:prstGeom>
-          <a:noFill/>
-        </p:spPr>
-        <p:txBody>
-          <a:bodyPr wrap="square" lIns="0" rIns="0" tIns="0" bIns="0">
-            <a:spAutoFit/>
-          </a:bodyPr>
-          <a:lstStyle/>
-          <a:p>
-            <a:pPr algn="l">
-              <a:spcBef>
-                <a:spcPts val="0"/>
-              </a:spcBef>
-            </a:pPr>
-            <a:r>
-              <a:rPr sz="900" b="0">
-                <a:solidFill>
-                  <a:srgbClr val="52514E"/>
-                </a:solidFill>
-                <a:latin typeface="Segoe UI"/>
-              </a:rPr>
-              <a:t>D04   ·   02:00   ·   C4.1.1   ·   criteres 5, 2</a:t>
-            </a:r>
-          </a:p>
-        </p:txBody>
-      </p:sp>
-      <p:sp>
-        <p:nvSpPr>
-          <p:cNvPr id="27" name="TextBox 26"/>
-          <p:cNvSpPr txBox="1"/>
-          <p:nvPr/>
-        </p:nvSpPr>
-        <p:spPr>
-          <a:xfrm>
             <a:off x="10070287" y="6254496"/>
             <a:ext cx="1463040" cy="274320"/>
           </a:xfrm>
@@ -25716,45 +24702,6 @@
         </p:nvSpPr>
         <p:spPr>
           <a:xfrm>
-            <a:off x="786384" y="6254496"/>
-            <a:ext cx="8229600" cy="274320"/>
-          </a:xfrm>
-          <a:prstGeom prst="rect">
-            <a:avLst/>
-          </a:prstGeom>
-          <a:noFill/>
-        </p:spPr>
-        <p:txBody>
-          <a:bodyPr wrap="square" lIns="0" rIns="0" tIns="0" bIns="0">
-            <a:spAutoFit/>
-          </a:bodyPr>
-          <a:lstStyle/>
-          <a:p>
-            <a:pPr algn="l">
-              <a:spcBef>
-                <a:spcPts val="0"/>
-              </a:spcBef>
-            </a:pPr>
-            <a:r>
-              <a:rPr sz="900" b="0">
-                <a:solidFill>
-                  <a:srgbClr val="52514E"/>
-                </a:solidFill>
-                <a:latin typeface="Segoe UI"/>
-              </a:rPr>
-              <a:t>D05   ·   02:50   ·   C4.1.1   ·   criteres 3, 4</a:t>
-            </a:r>
-          </a:p>
-        </p:txBody>
-      </p:sp>
-      <p:sp>
-        <p:nvSpPr>
-          <p:cNvPr id="17" name="TextBox 16"/>
-          <p:cNvSpPr txBox="1"/>
-          <p:nvPr/>
-        </p:nvSpPr>
-        <p:spPr>
-          <a:xfrm>
             <a:off x="10070287" y="6254496"/>
             <a:ext cx="1463040" cy="274320"/>
           </a:xfrm>
@@ -26085,45 +25032,6 @@
         </p:nvSpPr>
         <p:spPr>
           <a:xfrm>
-            <a:off x="786384" y="6254496"/>
-            <a:ext cx="8229600" cy="274320"/>
-          </a:xfrm>
-          <a:prstGeom prst="rect">
-            <a:avLst/>
-          </a:prstGeom>
-          <a:noFill/>
-        </p:spPr>
-        <p:txBody>
-          <a:bodyPr wrap="square" lIns="0" rIns="0" tIns="0" bIns="0">
-            <a:spAutoFit/>
-          </a:bodyPr>
-          <a:lstStyle/>
-          <a:p>
-            <a:pPr algn="l">
-              <a:spcBef>
-                <a:spcPts val="0"/>
-              </a:spcBef>
-            </a:pPr>
-            <a:r>
-              <a:rPr sz="900" b="0">
-                <a:solidFill>
-                  <a:srgbClr val="52514E"/>
-                </a:solidFill>
-                <a:latin typeface="Segoe UI"/>
-              </a:rPr>
-              <a:t>D06   ·   03:30   ·   C4.1.2   ·   criteres 6, 7</a:t>
-            </a:r>
-          </a:p>
-        </p:txBody>
-      </p:sp>
-      <p:sp>
-        <p:nvSpPr>
-          <p:cNvPr id="10" name="TextBox 9"/>
-          <p:cNvSpPr txBox="1"/>
-          <p:nvPr/>
-        </p:nvSpPr>
-        <p:spPr>
-          <a:xfrm>
             <a:off x="10070287" y="6254496"/>
             <a:ext cx="1463040" cy="274320"/>
           </a:xfrm>
@@ -26782,45 +25690,6 @@
         </p:nvSpPr>
         <p:spPr>
           <a:xfrm>
-            <a:off x="786384" y="6254496"/>
-            <a:ext cx="8229600" cy="274320"/>
-          </a:xfrm>
-          <a:prstGeom prst="rect">
-            <a:avLst/>
-          </a:prstGeom>
-          <a:noFill/>
-        </p:spPr>
-        <p:txBody>
-          <a:bodyPr wrap="square" lIns="0" rIns="0" tIns="0" bIns="0">
-            <a:spAutoFit/>
-          </a:bodyPr>
-          <a:lstStyle/>
-          <a:p>
-            <a:pPr algn="l">
-              <a:spcBef>
-                <a:spcPts val="0"/>
-              </a:spcBef>
-            </a:pPr>
-            <a:r>
-              <a:rPr sz="900" b="0">
-                <a:solidFill>
-                  <a:srgbClr val="52514E"/>
-                </a:solidFill>
-                <a:latin typeface="Segoe UI"/>
-              </a:rPr>
-              <a:t>D07   ·   04:40   ·   C4.1.2   ·   criteres 8</a:t>
-            </a:r>
-          </a:p>
-        </p:txBody>
-      </p:sp>
-      <p:sp>
-        <p:nvSpPr>
-          <p:cNvPr id="17" name="TextBox 16"/>
-          <p:cNvSpPr txBox="1"/>
-          <p:nvPr/>
-        </p:nvSpPr>
-        <p:spPr>
-          <a:xfrm>
             <a:off x="10070287" y="6254496"/>
             <a:ext cx="1463040" cy="274320"/>
           </a:xfrm>
@@ -27112,45 +25981,6 @@
         </p:nvSpPr>
         <p:spPr>
           <a:xfrm>
-            <a:off x="786384" y="6254496"/>
-            <a:ext cx="8229600" cy="274320"/>
-          </a:xfrm>
-          <a:prstGeom prst="rect">
-            <a:avLst/>
-          </a:prstGeom>
-          <a:noFill/>
-        </p:spPr>
-        <p:txBody>
-          <a:bodyPr wrap="square" lIns="0" rIns="0" tIns="0" bIns="0">
-            <a:spAutoFit/>
-          </a:bodyPr>
-          <a:lstStyle/>
-          <a:p>
-            <a:pPr algn="l">
-              <a:spcBef>
-                <a:spcPts val="0"/>
-              </a:spcBef>
-            </a:pPr>
-            <a:r>
-              <a:rPr sz="900" b="0">
-                <a:solidFill>
-                  <a:srgbClr val="52514E"/>
-                </a:solidFill>
-                <a:latin typeface="Segoe UI"/>
-              </a:rPr>
-              <a:t>D08   ·   05:30   ·   C4.1.2   ·   criteres 9</a:t>
-            </a:r>
-          </a:p>
-        </p:txBody>
-      </p:sp>
-      <p:sp>
-        <p:nvSpPr>
-          <p:cNvPr id="9" name="TextBox 8"/>
-          <p:cNvSpPr txBox="1"/>
-          <p:nvPr/>
-        </p:nvSpPr>
-        <p:spPr>
-          <a:xfrm>
             <a:off x="10070287" y="6254496"/>
             <a:ext cx="1463040" cy="274320"/>
           </a:xfrm>
@@ -27476,45 +26306,6 @@
       <p:sp>
         <p:nvSpPr>
           <p:cNvPr id="9" name="TextBox 8"/>
-          <p:cNvSpPr txBox="1"/>
-          <p:nvPr/>
-        </p:nvSpPr>
-        <p:spPr>
-          <a:xfrm>
-            <a:off x="786384" y="6254496"/>
-            <a:ext cx="8229600" cy="274320"/>
-          </a:xfrm>
-          <a:prstGeom prst="rect">
-            <a:avLst/>
-          </a:prstGeom>
-          <a:noFill/>
-        </p:spPr>
-        <p:txBody>
-          <a:bodyPr wrap="square" lIns="0" rIns="0" tIns="0" bIns="0">
-            <a:spAutoFit/>
-          </a:bodyPr>
-          <a:lstStyle/>
-          <a:p>
-            <a:pPr algn="l">
-              <a:spcBef>
-                <a:spcPts val="0"/>
-              </a:spcBef>
-            </a:pPr>
-            <a:r>
-              <a:rPr sz="900" b="0">
-                <a:solidFill>
-                  <a:srgbClr val="52514E"/>
-                </a:solidFill>
-                <a:latin typeface="Segoe UI"/>
-              </a:rPr>
-              <a:t>D09   ·   06:30   ·   C4.2.1   ·   criteres 10, 12</a:t>
-            </a:r>
-          </a:p>
-        </p:txBody>
-      </p:sp>
-      <p:sp>
-        <p:nvSpPr>
-          <p:cNvPr id="10" name="TextBox 9"/>
           <p:cNvSpPr txBox="1"/>
           <p:nvPr/>
         </p:nvSpPr>

--- a/docs/support_soutenance.pptx
+++ b/docs/support_soutenance.pptx
@@ -3101,38 +3101,48 @@
           </a:p>
           <a:p>
             <a:r>
-              <a:t>- Ce qui a tranché : la LANGUE du message d'erreur</a:t>
-            </a:r>
-          </a:p>
-          <a:p>
-            <a:r>
-              <a:t>- L'image du conteneur est une Alpine en locale C : elle ne peut répondre qu'en anglais ASCII</a:t>
-            </a:r>
-          </a:p>
-          <a:p>
-            <a:r>
-              <a:t>- Un message en français accentué prouvait donc que l'interlocuteur n'était pas le conteneur</a:t>
-            </a:r>
-          </a:p>
-          <a:p>
-            <a:r>
-              <a:t>- Trois scénarios de correction pesés, dont deux écartés pour leurs effets de bord</a:t>
-            </a:r>
-          </a:p>
-          <a:p>
-            <a:r>
-              <a:t>- Retenu : publier sur le port hôte 5433, et écrire dans le fichier pourquoi ce n'est pas 5432</a:t>
+              <a:t>- Ce qui a tranché : la LANGUE du message d'erreur, devenue empreinte du serveur</a:t>
+            </a:r>
+          </a:p>
+          <a:p>
+            <a:r>
+              <a:t>- Une Alpine en locale C ne peut répondre qu'en anglais ASCII : le français prouvait l'imposture</a:t>
+            </a:r>
+          </a:p>
+          <a:p>
+            <a:r>
+              <a:t>- Communication, immédiat : mention en daily, tout poste avec un PostgreSQL local se bloquera pareil</a:t>
+            </a:r>
+          </a:p>
+          <a:p>
+            <a:r>
+              <a:t>- Puis un prérequis ajouté à la procédure d'installation, et cette entrée de journal pour la trace</a:t>
+            </a:r>
+          </a:p>
+          <a:p>
+            <a:r>
+              <a:t>- Résultat vérifié par l'exécution : 15 titres écrits, chaîne complète, rejeu idempotent à 0 inséré</a:t>
             </a:r>
           </a:p>
           <a:p/>
           <a:p>
             <a:r>
-              <a:t>C'est le cœur du livrable C4.4.2 : la nature du problème, les actions selon les</a:t>
-            </a:r>
-          </a:p>
-          <a:p>
-            <a:r>
-              <a:t>scénarios, la communication, les résultats attendus.</a:t>
+              <a:t>C'est le cœur du livrable C4.4.2, et la grille y attend quatre choses : la</a:t>
+            </a:r>
+          </a:p>
+          <a:p>
+            <a:r>
+              <a:t>nature du problème, les actions selon les scénarios, **la communication aux</a:t>
+            </a:r>
+          </a:p>
+          <a:p>
+            <a:r>
+              <a:t>parties prenantes**, et les résultats. La troisième est celle que les candidats</a:t>
+            </a:r>
+          </a:p>
+          <a:p>
+            <a:r>
+              <a:t>oublient le plus souvent ; elle est ici en deux puces, immédiat puis durable.</a:t>
             </a:r>
           </a:p>
           <a:p/>
@@ -3144,6 +3154,32 @@
           <a:p>
             <a:r>
               <a:t>a servi d'empreinte pour identifier quel serveur répondait. Le dire ainsi.</a:t>
+            </a:r>
+          </a:p>
+          <a:p/>
+          <a:p>
+            <a:r>
+              <a:t>Fermer sur la phrase de résultat que la grille demande : **la méthode a résolu</a:t>
+            </a:r>
+          </a:p>
+          <a:p>
+            <a:r>
+              <a:t>l'incident**, et la vérification n'a pas été l'absence d'erreur mais l'exécution</a:t>
+            </a:r>
+          </a:p>
+          <a:p>
+            <a:r>
+              <a:t>réelle de la chaîne. Ajouter que le port 5433 est commenté dans</a:t>
+            </a:r>
+          </a:p>
+          <a:p>
+            <a:r>
+              <a:t>`docker-compose.yml` pour que personne ne « corrige » l'anomalie apparente et ne</a:t>
+            </a:r>
+          </a:p>
+          <a:p>
+            <a:r>
+              <a:t>réintroduise l'incident.</a:t>
             </a:r>
           </a:p>
           <a:p/>
@@ -3564,6 +3600,22 @@
           <a:p>
             <a:r>
               <a:t>couche Bronze en PostgreSQL plutôt qu'en stockage objet.</a:t>
+            </a:r>
+          </a:p>
+          <a:p/>
+          <a:p>
+            <a:r>
+              <a:t>La grille demande que ce rapport **permette de cadrer le travail de conception**.</a:t>
+            </a:r>
+          </a:p>
+          <a:p>
+            <a:r>
+              <a:t>Le dire en quittant la diapositive, avec un exemple et non en général : c'est</a:t>
+            </a:r>
+          </a:p>
+          <a:p>
+            <a:r>
+              <a:t>cette analyse qui a écarté le stockage objet, et non un arbitrage pris plus tard.</a:t>
             </a:r>
           </a:p>
           <a:p/>
@@ -24273,7 +24325,7 @@
         <p:spPr>
           <a:xfrm>
             <a:off x="896112" y="1796796"/>
-            <a:ext cx="10637215" cy="888796"/>
+            <a:ext cx="10637215" cy="740664"/>
           </a:xfrm>
           <a:prstGeom prst="rect">
             <a:avLst/>
@@ -24314,7 +24366,7 @@
         </p:nvSpPr>
         <p:spPr>
           <a:xfrm>
-            <a:off x="658368" y="2749600"/>
+            <a:off x="658368" y="2604516"/>
             <a:ext cx="68580" cy="68580"/>
           </a:xfrm>
           <a:prstGeom prst="rect">
@@ -24358,8 +24410,8 @@
         </p:nvSpPr>
         <p:spPr>
           <a:xfrm>
-            <a:off x="896112" y="2667304"/>
-            <a:ext cx="10637215" cy="888796"/>
+            <a:off x="896112" y="2522220"/>
+            <a:ext cx="10637215" cy="740664"/>
           </a:xfrm>
           <a:prstGeom prst="rect">
             <a:avLst/>
@@ -24400,7 +24452,7 @@
         </p:nvSpPr>
         <p:spPr>
           <a:xfrm>
-            <a:off x="658368" y="3620109"/>
+            <a:off x="658368" y="3329940"/>
             <a:ext cx="68580" cy="68580"/>
           </a:xfrm>
           <a:prstGeom prst="rect">
@@ -24444,8 +24496,8 @@
         </p:nvSpPr>
         <p:spPr>
           <a:xfrm>
-            <a:off x="896112" y="3537813"/>
-            <a:ext cx="10637215" cy="888796"/>
+            <a:off x="896112" y="3247644"/>
+            <a:ext cx="10637215" cy="740664"/>
           </a:xfrm>
           <a:prstGeom prst="rect">
             <a:avLst/>
@@ -24486,7 +24538,7 @@
         </p:nvSpPr>
         <p:spPr>
           <a:xfrm>
-            <a:off x="658368" y="4490618"/>
+            <a:off x="658368" y="4055364"/>
             <a:ext cx="68580" cy="68580"/>
           </a:xfrm>
           <a:prstGeom prst="rect">
@@ -24530,8 +24582,8 @@
         </p:nvSpPr>
         <p:spPr>
           <a:xfrm>
-            <a:off x="896112" y="4408322"/>
-            <a:ext cx="10637215" cy="888796"/>
+            <a:off x="896112" y="3973068"/>
+            <a:ext cx="10637215" cy="740664"/>
           </a:xfrm>
           <a:prstGeom prst="rect">
             <a:avLst/>
@@ -24572,7 +24624,7 @@
         </p:nvSpPr>
         <p:spPr>
           <a:xfrm>
-            <a:off x="658368" y="5361127"/>
+            <a:off x="658368" y="4780788"/>
             <a:ext cx="68580" cy="68580"/>
           </a:xfrm>
           <a:prstGeom prst="rect">
@@ -24616,8 +24668,8 @@
         </p:nvSpPr>
         <p:spPr>
           <a:xfrm>
-            <a:off x="896112" y="5278831"/>
-            <a:ext cx="10637215" cy="888796"/>
+            <a:off x="896112" y="4698492"/>
+            <a:ext cx="10637215" cy="740664"/>
           </a:xfrm>
           <a:prstGeom prst="rect">
             <a:avLst/>
@@ -24658,8 +24710,8 @@
         </p:nvSpPr>
         <p:spPr>
           <a:xfrm>
-            <a:off x="658368" y="6291072"/>
-            <a:ext cx="28000" cy="146304"/>
+            <a:off x="658368" y="5506212"/>
+            <a:ext cx="68580" cy="68580"/>
           </a:xfrm>
           <a:prstGeom prst="rect">
             <a:avLst/>
@@ -24697,6 +24749,92 @@
       <p:sp>
         <p:nvSpPr>
           <p:cNvPr id="16" name="TextBox 15"/>
+          <p:cNvSpPr txBox="1"/>
+          <p:nvPr/>
+        </p:nvSpPr>
+        <p:spPr>
+          <a:xfrm>
+            <a:off x="896112" y="5423916"/>
+            <a:ext cx="10637215" cy="740664"/>
+          </a:xfrm>
+          <a:prstGeom prst="rect">
+            <a:avLst/>
+          </a:prstGeom>
+          <a:noFill/>
+        </p:spPr>
+        <p:txBody>
+          <a:bodyPr wrap="square" lIns="0" rIns="0" tIns="0" bIns="0">
+            <a:spAutoFit/>
+          </a:bodyPr>
+          <a:lstStyle/>
+          <a:p>
+            <a:pPr algn="l">
+              <a:lnSpc>
+                <a:spcPct val="115000"/>
+              </a:lnSpc>
+              <a:spcBef>
+                <a:spcPts val="0"/>
+              </a:spcBef>
+            </a:pPr>
+            <a:r>
+              <a:rPr sz="1750" b="0">
+                <a:solidFill>
+                  <a:srgbClr val="0B0B0B"/>
+                </a:solidFill>
+                <a:latin typeface="Segoe UI"/>
+              </a:rPr>
+              <a:t>Ce cadrage a décidé la suite : couche Bronze en PostgreSQL et non en stockage objet, entrepôt dimensionné XS</a:t>
+            </a:r>
+          </a:p>
+        </p:txBody>
+      </p:sp>
+      <p:sp>
+        <p:nvSpPr>
+          <p:cNvPr id="17" name="Rectangle 16"/>
+          <p:cNvSpPr/>
+          <p:nvPr/>
+        </p:nvSpPr>
+        <p:spPr>
+          <a:xfrm>
+            <a:off x="658368" y="6291072"/>
+            <a:ext cx="28000" cy="146304"/>
+          </a:xfrm>
+          <a:prstGeom prst="rect">
+            <a:avLst/>
+          </a:prstGeom>
+          <a:solidFill>
+            <a:srgbClr val="2A78D6"/>
+          </a:solidFill>
+          <a:ln>
+            <a:noFill/>
+          </a:ln>
+          <a:effectLst/>
+        </p:spPr>
+        <p:style>
+          <a:lnRef idx="1">
+            <a:schemeClr val="accent1"/>
+          </a:lnRef>
+          <a:fillRef idx="3">
+            <a:schemeClr val="accent1"/>
+          </a:fillRef>
+          <a:effectRef idx="2">
+            <a:schemeClr val="accent1"/>
+          </a:effectRef>
+          <a:fontRef idx="minor">
+            <a:schemeClr val="lt1"/>
+          </a:fontRef>
+        </p:style>
+        <p:txBody>
+          <a:bodyPr rtlCol="0" anchor="ctr"/>
+          <a:lstStyle/>
+          <a:p>
+            <a:pPr algn="ctr"/>
+          </a:p>
+        </p:txBody>
+      </p:sp>
+      <p:sp>
+        <p:nvSpPr>
+          <p:cNvPr id="18" name="TextBox 17"/>
           <p:cNvSpPr txBox="1"/>
           <p:nvPr/>
         </p:nvSpPr>

--- a/docs/support_soutenance.pptx
+++ b/docs/support_soutenance.pptx
@@ -15992,52 +15992,30 @@
           </a:p>
         </p:txBody>
       </p:sp>
-      <p:sp>
-        <p:nvSpPr>
-          <p:cNvPr id="5" name="Rounded Rectangle 4"/>
-          <p:cNvSpPr/>
-          <p:nvPr/>
-        </p:nvSpPr>
-        <p:spPr>
-          <a:xfrm>
-            <a:off x="658368" y="1755648"/>
-            <a:ext cx="10874959" cy="4059936"/>
-          </a:xfrm>
-          <a:prstGeom prst="roundRect">
-            <a:avLst/>
-          </a:prstGeom>
-          <a:solidFill>
-            <a:srgbClr val="F1F2F4"/>
-          </a:solidFill>
-          <a:ln w="17780">
-            <a:solidFill>
-              <a:srgbClr val="C9CED5"/>
-            </a:solidFill>
-          </a:ln>
-          <a:effectLst/>
-        </p:spPr>
-        <p:style>
-          <a:lnRef idx="1">
-            <a:schemeClr val="accent1"/>
-          </a:lnRef>
-          <a:fillRef idx="3">
-            <a:schemeClr val="accent1"/>
-          </a:fillRef>
-          <a:effectRef idx="2">
-            <a:schemeClr val="accent1"/>
-          </a:effectRef>
-          <a:fontRef idx="minor">
-            <a:schemeClr val="lt1"/>
-          </a:fontRef>
-        </p:style>
-        <p:txBody>
-          <a:bodyPr rtlCol="0" anchor="ctr"/>
-          <a:lstStyle/>
-          <a:p>
-            <a:pPr algn="ctr"/>
-          </a:p>
-        </p:txBody>
-      </p:sp>
+      <p:pic>
+        <p:nvPicPr>
+          <p:cNvPr id="5" name="Picture 4" descr="github_actions.png"/>
+          <p:cNvPicPr>
+            <a:picLocks noChangeAspect="1"/>
+          </p:cNvPicPr>
+          <p:nvPr/>
+        </p:nvPicPr>
+        <p:blipFill>
+          <a:blip r:embed="rId2"/>
+          <a:stretch>
+            <a:fillRect/>
+          </a:stretch>
+        </p:blipFill>
+        <p:spPr>
+          <a:xfrm>
+            <a:off x="658368" y="1959597"/>
+            <a:ext cx="10874959" cy="3652038"/>
+          </a:xfrm>
+          <a:prstGeom prst="rect">
+            <a:avLst/>
+          </a:prstGeom>
+        </p:spPr>
+      </p:pic>
       <p:sp>
         <p:nvSpPr>
           <p:cNvPr id="6" name="TextBox 5"/>
@@ -16046,8 +16024,8 @@
         </p:nvSpPr>
         <p:spPr>
           <a:xfrm>
-            <a:off x="1572768" y="3282696"/>
-            <a:ext cx="9046159" cy="1097280"/>
+            <a:off x="658368" y="5888736"/>
+            <a:ext cx="10874959" cy="310896"/>
           </a:xfrm>
           <a:prstGeom prst="rect">
             <a:avLst/>
@@ -16060,89 +16038,18 @@
           </a:bodyPr>
           <a:lstStyle/>
           <a:p>
-            <a:pPr algn="ctr">
+            <a:pPr algn="l">
               <a:spcBef>
                 <a:spcPts val="0"/>
               </a:spcBef>
             </a:pPr>
             <a:r>
-              <a:rPr sz="1700" b="1">
-                <a:solidFill>
-                  <a:srgbClr val="EB6834"/>
+              <a:rPr sz="1300" b="0">
+                <a:solidFill>
+                  <a:srgbClr val="52514E"/>
                 </a:solidFill>
                 <a:latin typeface="Segoe UI"/>
               </a:rPr>
-              <a:t>Capture attendue</a:t>
-            </a:r>
-          </a:p>
-          <a:p>
-            <a:pPr algn="ctr">
-              <a:spcBef>
-                <a:spcPts val="1000"/>
-              </a:spcBef>
-            </a:pPr>
-            <a:r>
-              <a:rPr sz="1300" b="0">
-                <a:solidFill>
-                  <a:srgbClr val="52514E"/>
-                </a:solidFill>
-                <a:latin typeface="Segoe UI"/>
-              </a:rPr>
-              <a:t>docs/captures/github_actions.png</a:t>
-            </a:r>
-          </a:p>
-          <a:p>
-            <a:pPr algn="ctr">
-              <a:spcBef>
-                <a:spcPts val="500"/>
-              </a:spcBef>
-            </a:pPr>
-            <a:r>
-              <a:rPr sz="1150" b="0">
-                <a:solidFill>
-                  <a:srgbClr val="52514E"/>
-                </a:solidFill>
-                <a:latin typeface="Segoe UI"/>
-              </a:rPr>
-              <a:t>Deposer l'image, puis relancer le generateur</a:t>
-            </a:r>
-          </a:p>
-        </p:txBody>
-      </p:sp>
-      <p:sp>
-        <p:nvSpPr>
-          <p:cNvPr id="7" name="TextBox 6"/>
-          <p:cNvSpPr txBox="1"/>
-          <p:nvPr/>
-        </p:nvSpPr>
-        <p:spPr>
-          <a:xfrm>
-            <a:off x="658368" y="5888736"/>
-            <a:ext cx="10874959" cy="310896"/>
-          </a:xfrm>
-          <a:prstGeom prst="rect">
-            <a:avLst/>
-          </a:prstGeom>
-          <a:noFill/>
-        </p:spPr>
-        <p:txBody>
-          <a:bodyPr wrap="square" lIns="0" rIns="0" tIns="0" bIns="0">
-            <a:spAutoFit/>
-          </a:bodyPr>
-          <a:lstStyle/>
-          <a:p>
-            <a:pPr algn="l">
-              <a:spcBef>
-                <a:spcPts val="0"/>
-              </a:spcBef>
-            </a:pPr>
-            <a:r>
-              <a:rPr sz="1300" b="0">
-                <a:solidFill>
-                  <a:srgbClr val="52514E"/>
-                </a:solidFill>
-                <a:latin typeface="Segoe UI"/>
-              </a:rPr>
               <a:t>Le dernier run de la branche principale, six etages au vert.</a:t>
             </a:r>
           </a:p>
@@ -16150,7 +16057,7 @@
       </p:sp>
       <p:sp>
         <p:nvSpPr>
-          <p:cNvPr id="8" name="Rectangle 7"/>
+          <p:cNvPr id="7" name="Rectangle 6"/>
           <p:cNvSpPr/>
           <p:nvPr/>
         </p:nvSpPr>
@@ -16194,7 +16101,7 @@
       </p:sp>
       <p:sp>
         <p:nvSpPr>
-          <p:cNvPr id="9" name="TextBox 8"/>
+          <p:cNvPr id="8" name="TextBox 7"/>
           <p:cNvSpPr txBox="1"/>
           <p:nvPr/>
         </p:nvSpPr>

--- a/docs/support_soutenance.pptx
+++ b/docs/support_soutenance.pptx
@@ -673,6 +673,14 @@
               <a:t>   table fact_prices`</a:t>
             </a:r>
           </a:p>
+          <a:p/>
+          <a:p>
+            <a:r>
+              <a:t>docker exec gamelens-postgres psql -U dashboard_viewer -d gamelens -c 'SELECT count(*) FROM mart.fact_prices;'</a:t>
+            </a:r>
+          </a:p>
+          <a:p/>
+          <a:p/>
           <a:p>
             <a:r>
               <a:t>2. le même rôle interroge `mart.v_popularity_dashboard` : trois lignes de</a:t>
@@ -686,14 +694,10 @@
           <a:p/>
           <a:p>
             <a:r>
-              <a:t>Dire pendant que ça tourne : « le cloisonnement se prouve mieux par un refus que</a:t>
-            </a:r>
-          </a:p>
-          <a:p>
-            <a:r>
-              <a:t>par une matrice de droits ».</a:t>
-            </a:r>
-          </a:p>
+              <a:t>docker exec gamelens-postgres psql -U dashboard_viewer -d gamelens -c 'SELECT unified_name, day, avg_player_count, avg_viewer_count FROM mart.v_popularity_dashboard ORDER BY day DESC, avg_player_count DESC LIMIT 3;'</a:t>
+            </a:r>
+          </a:p>
+          <a:p/>
           <a:p/>
           <a:p>
             <a:r>
@@ -17552,52 +17556,30 @@
           </a:p>
         </p:txBody>
       </p:sp>
-      <p:sp>
-        <p:nvSpPr>
-          <p:cNvPr id="6" name="Rounded Rectangle 5"/>
-          <p:cNvSpPr/>
-          <p:nvPr/>
-        </p:nvSpPr>
-        <p:spPr>
-          <a:xfrm>
-            <a:off x="658368" y="1755648"/>
-            <a:ext cx="10874959" cy="3287268"/>
-          </a:xfrm>
-          <a:prstGeom prst="roundRect">
-            <a:avLst/>
-          </a:prstGeom>
-          <a:solidFill>
-            <a:srgbClr val="F1F2F4"/>
-          </a:solidFill>
-          <a:ln w="15240">
-            <a:solidFill>
-              <a:srgbClr val="C9CED5"/>
-            </a:solidFill>
-          </a:ln>
-          <a:effectLst/>
-        </p:spPr>
-        <p:style>
-          <a:lnRef idx="1">
-            <a:schemeClr val="accent1"/>
-          </a:lnRef>
-          <a:fillRef idx="3">
-            <a:schemeClr val="accent1"/>
-          </a:fillRef>
-          <a:effectRef idx="2">
-            <a:schemeClr val="accent1"/>
-          </a:effectRef>
-          <a:fontRef idx="minor">
-            <a:schemeClr val="lt1"/>
-          </a:fontRef>
-        </p:style>
-        <p:txBody>
-          <a:bodyPr rtlCol="0" anchor="ctr"/>
-          <a:lstStyle/>
-          <a:p>
-            <a:pPr algn="ctr"/>
-          </a:p>
-        </p:txBody>
-      </p:sp>
+      <p:pic>
+        <p:nvPicPr>
+          <p:cNvPr id="6" name="Picture 5" descr="grafana.png"/>
+          <p:cNvPicPr>
+            <a:picLocks noChangeAspect="1"/>
+          </p:cNvPicPr>
+          <p:nvPr/>
+        </p:nvPicPr>
+        <p:blipFill>
+          <a:blip r:embed="rId2"/>
+          <a:stretch>
+            <a:fillRect/>
+          </a:stretch>
+        </p:blipFill>
+        <p:spPr>
+          <a:xfrm>
+            <a:off x="2561210" y="1755648"/>
+            <a:ext cx="7069274" cy="4059936"/>
+          </a:xfrm>
+          <a:prstGeom prst="rect">
+            <a:avLst/>
+          </a:prstGeom>
+        </p:spPr>
+      </p:pic>
       <p:sp>
         <p:nvSpPr>
           <p:cNvPr id="7" name="TextBox 6"/>
@@ -17606,8 +17588,8 @@
         </p:nvSpPr>
         <p:spPr>
           <a:xfrm>
-            <a:off x="969264" y="1993392"/>
-            <a:ext cx="10253167" cy="2830068"/>
+            <a:off x="658368" y="5888736"/>
+            <a:ext cx="10874959" cy="310896"/>
           </a:xfrm>
           <a:prstGeom prst="rect">
             <a:avLst/>
@@ -17626,237 +17608,13 @@
               </a:spcBef>
             </a:pPr>
             <a:r>
-              <a:rPr sz="1100" b="0">
-                <a:solidFill>
-                  <a:srgbClr val="0B0B0B"/>
-                </a:solidFill>
-                <a:latin typeface="Consolas"/>
+              <a:rPr sz="1300" b="0">
+                <a:solidFill>
+                  <a:srgbClr val="52514E"/>
+                </a:solidFill>
+                <a:latin typeface="Segoe UI"/>
               </a:rPr>
-              <a:t>SELECT * FROM speed.v_indicateur_fraicheur;</a:t>
-            </a:r>
-          </a:p>
-          <a:p>
-            <a:pPr algn="l">
-              <a:spcBef>
-                <a:spcPts val="0"/>
-              </a:spcBef>
-            </a:pPr>
-            <a:r>
-              <a:rPr sz="1100" b="0">
-                <a:solidFill>
-                  <a:srgbClr val="0B0B0B"/>
-                </a:solidFill>
-                <a:latin typeface="Consolas"/>
-              </a:rPr>
-              <a:t>     flux      |   derniere_collecte    | age_minutes | evenements_24h </a:t>
-            </a:r>
-          </a:p>
-          <a:p>
-            <a:pPr algn="l">
-              <a:spcBef>
-                <a:spcPts val="0"/>
-              </a:spcBef>
-            </a:pPr>
-            <a:r>
-              <a:rPr sz="1100" b="0">
-                <a:solidFill>
-                  <a:srgbClr val="0B0B0B"/>
-                </a:solidFill>
-                <a:latin typeface="Consolas"/>
-              </a:rPr>
-              <a:t>---------------+------------------------+-------------+----------------</a:t>
-            </a:r>
-          </a:p>
-          <a:p>
-            <a:pPr algn="l">
-              <a:spcBef>
-                <a:spcPts val="0"/>
-              </a:spcBef>
-            </a:pPr>
-            <a:r>
-              <a:rPr sz="1100" b="0">
-                <a:solidFill>
-                  <a:srgbClr val="0B0B0B"/>
-                </a:solidFill>
-                <a:latin typeface="Consolas"/>
-              </a:rPr>
-              <a:t> frequentation | 2026-09-01 08:45:01+00 |         0.8 |            405</a:t>
-            </a:r>
-          </a:p>
-          <a:p>
-            <a:pPr algn="l">
-              <a:spcBef>
-                <a:spcPts val="0"/>
-              </a:spcBef>
-            </a:pPr>
-            <a:r>
-              <a:rPr sz="1100" b="0">
-                <a:solidFill>
-                  <a:srgbClr val="0B0B0B"/>
-                </a:solidFill>
-                <a:latin typeface="Consolas"/>
-              </a:rPr>
-              <a:t> tarification  | 2026-09-01 06:36:54+00 |       128.9 |             15</a:t>
-            </a:r>
-          </a:p>
-          <a:p>
-            <a:pPr algn="l">
-              <a:spcBef>
-                <a:spcPts val="0"/>
-              </a:spcBef>
-            </a:pPr>
-            <a:r>
-              <a:rPr sz="1100" b="0">
-                <a:solidFill>
-                  <a:srgbClr val="0B0B0B"/>
-                </a:solidFill>
-                <a:latin typeface="Consolas"/>
-              </a:rPr>
-              <a:t>(2 rows)</a:t>
-            </a:r>
-          </a:p>
-          <a:p>
-            <a:pPr algn="l">
-              <a:spcBef>
-                <a:spcPts val="0"/>
-              </a:spcBef>
-            </a:pPr>
-            <a:r>
-              <a:rPr sz="1100" b="0">
-                <a:solidFill>
-                  <a:srgbClr val="0B0B0B"/>
-                </a:solidFill>
-                <a:latin typeface="Consolas"/>
-              </a:rPr>
-              <a:t>SELECT * FROM speed.v_indicateur_completude;</a:t>
-            </a:r>
-          </a:p>
-          <a:p>
-            <a:pPr algn="l">
-              <a:spcBef>
-                <a:spcPts val="0"/>
-              </a:spcBef>
-            </a:pPr>
-            <a:r>
-              <a:rPr sz="1100" b="0">
-                <a:solidFill>
-                  <a:srgbClr val="0B0B0B"/>
-                </a:solidFill>
-                <a:latin typeface="Consolas"/>
-              </a:rPr>
-              <a:t> titres_attendus | titres_collectes_24h | titres_manquants | taux_completude_pct </a:t>
-            </a:r>
-          </a:p>
-          <a:p>
-            <a:pPr algn="l">
-              <a:spcBef>
-                <a:spcPts val="0"/>
-              </a:spcBef>
-            </a:pPr>
-            <a:r>
-              <a:rPr sz="1100" b="0">
-                <a:solidFill>
-                  <a:srgbClr val="0B0B0B"/>
-                </a:solidFill>
-                <a:latin typeface="Consolas"/>
-              </a:rPr>
-              <a:t>-----------------+----------------------+------------------+---------------------</a:t>
-            </a:r>
-          </a:p>
-          <a:p>
-            <a:pPr algn="l">
-              <a:spcBef>
-                <a:spcPts val="0"/>
-              </a:spcBef>
-            </a:pPr>
-            <a:r>
-              <a:rPr sz="1100" b="0">
-                <a:solidFill>
-                  <a:srgbClr val="0B0B0B"/>
-                </a:solidFill>
-                <a:latin typeface="Consolas"/>
-              </a:rPr>
-              <a:t>              15 |                   15 |                0 |               100.0</a:t>
-            </a:r>
-          </a:p>
-          <a:p>
-            <a:pPr algn="l">
-              <a:spcBef>
-                <a:spcPts val="0"/>
-              </a:spcBef>
-            </a:pPr>
-            <a:r>
-              <a:rPr sz="1100" b="0">
-                <a:solidFill>
-                  <a:srgbClr val="0B0B0B"/>
-                </a:solidFill>
-                <a:latin typeface="Consolas"/>
-              </a:rPr>
-              <a:t>(1 row)</a:t>
-            </a:r>
-          </a:p>
-          <a:p>
-            <a:pPr algn="l">
-              <a:spcBef>
-                <a:spcPts val="0"/>
-              </a:spcBef>
-            </a:pPr>
-            <a:r>
-              <a:rPr sz="1100" b="0">
-                <a:solidFill>
-                  <a:srgbClr val="0B0B0B"/>
-                </a:solidFill>
-                <a:latin typeface="Consolas"/>
-              </a:rPr>
-              <a:t>SELECT * FROM speed.v_indicateur_latence;</a:t>
-            </a:r>
-          </a:p>
-          <a:p>
-            <a:pPr algn="l">
-              <a:spcBef>
-                <a:spcPts val="0"/>
-              </a:spcBef>
-            </a:pPr>
-            <a:r>
-              <a:rPr sz="1100" b="0">
-                <a:solidFill>
-                  <a:srgbClr val="0B0B0B"/>
-                </a:solidFill>
-                <a:latin typeface="Consolas"/>
-              </a:rPr>
-              <a:t> echantillon_24h | latence_moyenne_s | latence_max_s | latence_p95_s </a:t>
-            </a:r>
-          </a:p>
-          <a:p>
-            <a:pPr algn="l">
-              <a:spcBef>
-                <a:spcPts val="0"/>
-              </a:spcBef>
-            </a:pPr>
-            <a:r>
-              <a:rPr sz="1100" b="0">
-                <a:solidFill>
-                  <a:srgbClr val="0B0B0B"/>
-                </a:solidFill>
-                <a:latin typeface="Consolas"/>
-              </a:rPr>
-              <a:t>-----------------+-------------------+---------------+---------------</a:t>
-            </a:r>
-          </a:p>
-          <a:p>
-            <a:pPr algn="l">
-              <a:spcBef>
-                <a:spcPts val="0"/>
-              </a:spcBef>
-            </a:pPr>
-            <a:r>
-              <a:rPr sz="1100" b="0">
-                <a:solidFill>
-                  <a:srgbClr val="0B0B0B"/>
-                </a:solidFill>
-                <a:latin typeface="Consolas"/>
-              </a:rPr>
-              <a:t>             405 |             42.32 |         58.82 |         45.72</a:t>
+              <a:t>Capture du 01/09, docs/preuves/c19_supervision_indicateurs.txt</a:t>
             </a:r>
           </a:p>
         </p:txBody>
